--- a/HomeWorks/homework2/images.pptx
+++ b/HomeWorks/homework2/images.pptx
@@ -5,8 +5,9 @@
     <p:sldMasterId id="2147483648" r:id="rId1"/>
   </p:sldMasterIdLst>
   <p:sldIdLst>
-    <p:sldId id="256" r:id="rId2"/>
-    <p:sldId id="257" r:id="rId3"/>
+    <p:sldId id="257" r:id="rId2"/>
+    <p:sldId id="258" r:id="rId3"/>
+    <p:sldId id="259" r:id="rId4"/>
   </p:sldIdLst>
   <p:sldSz cx="12192000" cy="6858000"/>
   <p:notesSz cx="6858000" cy="9144000"/>
@@ -3350,10 +3351,10 @@
       </p:grpSpPr>
       <p:sp>
         <p:nvSpPr>
-          <p:cNvPr id="4" name="Rounded Rectangle 3">
-            <a:extLst>
-              <a:ext uri="{FF2B5EF4-FFF2-40B4-BE49-F238E27FC236}">
-                <a16:creationId xmlns:a16="http://schemas.microsoft.com/office/drawing/2014/main" id="{C408DF36-512A-C146-9936-E78549573286}"/>
+          <p:cNvPr id="27" name="Rounded Rectangle 26">
+            <a:extLst>
+              <a:ext uri="{FF2B5EF4-FFF2-40B4-BE49-F238E27FC236}">
+                <a16:creationId xmlns:a16="http://schemas.microsoft.com/office/drawing/2014/main" id="{1191F585-71DA-8343-A556-EB7194E7B766}"/>
               </a:ext>
             </a:extLst>
           </p:cNvPr>
@@ -3362,320 +3363,18 @@
         </p:nvSpPr>
         <p:spPr>
           <a:xfrm>
-            <a:off x="829520" y="5329310"/>
-            <a:ext cx="4436006" cy="854320"/>
+            <a:off x="338559" y="478503"/>
+            <a:ext cx="11514882" cy="5900994"/>
           </a:xfrm>
           <a:prstGeom prst="roundRect">
             <a:avLst>
-              <a:gd name="adj" fmla="val 0"/>
+              <a:gd name="adj" fmla="val 2828"/>
             </a:avLst>
           </a:prstGeom>
           <a:noFill/>
-          <a:ln>
-            <a:noFill/>
-          </a:ln>
-          <a:effectLst/>
-        </p:spPr>
-        <p:style>
-          <a:lnRef idx="2">
-            <a:schemeClr val="accent1">
-              <a:shade val="50000"/>
-            </a:schemeClr>
-          </a:lnRef>
-          <a:fillRef idx="1">
-            <a:schemeClr val="accent1"/>
-          </a:fillRef>
-          <a:effectRef idx="0">
-            <a:schemeClr val="accent1"/>
-          </a:effectRef>
-          <a:fontRef idx="minor">
-            <a:schemeClr val="lt1"/>
-          </a:fontRef>
-        </p:style>
-        <p:txBody>
-          <a:bodyPr rtlCol="0" anchor="ctr"/>
-          <a:lstStyle/>
-          <a:p>
-            <a:pPr algn="ctr"/>
-            <a:r>
-              <a:rPr lang="en-US" altLang="zh-CN" sz="2400" b="1" i="1" dirty="0">
-                <a:solidFill>
-                  <a:srgbClr val="C00000"/>
-                </a:solidFill>
-                <a:latin typeface="Times New Roman" panose="02020603050405020304" pitchFamily="18" charset="0"/>
-                <a:ea typeface="KaiTi" panose="02010609060101010101" pitchFamily="49" charset="-122"/>
-                <a:cs typeface="Times New Roman" panose="02020603050405020304" pitchFamily="18" charset="0"/>
-              </a:rPr>
-              <a:t>PBOC</a:t>
-            </a:r>
-            <a:r>
-              <a:rPr lang="zh-CN" altLang="en-US" sz="2400" b="1" i="1" dirty="0">
-                <a:solidFill>
-                  <a:srgbClr val="C00000"/>
-                </a:solidFill>
-                <a:latin typeface="Times New Roman" panose="02020603050405020304" pitchFamily="18" charset="0"/>
-                <a:ea typeface="KaiTi" panose="02010609060101010101" pitchFamily="49" charset="-122"/>
-                <a:cs typeface="Times New Roman" panose="02020603050405020304" pitchFamily="18" charset="0"/>
-              </a:rPr>
-              <a:t> </a:t>
-            </a:r>
-            <a:r>
-              <a:rPr lang="en-US" altLang="zh-CN" sz="2400" b="1" i="1" dirty="0">
-                <a:solidFill>
-                  <a:srgbClr val="C00000"/>
-                </a:solidFill>
-                <a:latin typeface="Times New Roman" panose="02020603050405020304" pitchFamily="18" charset="0"/>
-                <a:ea typeface="KaiTi" panose="02010609060101010101" pitchFamily="49" charset="-122"/>
-                <a:cs typeface="Times New Roman" panose="02020603050405020304" pitchFamily="18" charset="0"/>
-              </a:rPr>
-              <a:t>Sept. 24th </a:t>
-            </a:r>
-          </a:p>
-          <a:p>
-            <a:pPr algn="ctr"/>
-            <a:r>
-              <a:rPr lang="en-US" altLang="zh-CN" sz="2400" b="1" i="1" dirty="0">
-                <a:solidFill>
-                  <a:srgbClr val="C00000"/>
-                </a:solidFill>
-                <a:latin typeface="Times New Roman" panose="02020603050405020304" pitchFamily="18" charset="0"/>
-                <a:ea typeface="KaiTi" panose="02010609060101010101" pitchFamily="49" charset="-122"/>
-                <a:cs typeface="Times New Roman" panose="02020603050405020304" pitchFamily="18" charset="0"/>
-              </a:rPr>
-              <a:t>Monetary Easing Package </a:t>
-            </a:r>
-            <a:endParaRPr lang="en-CN" sz="2400" b="1" i="1" dirty="0">
-              <a:solidFill>
-                <a:srgbClr val="C00000"/>
-              </a:solidFill>
-              <a:latin typeface="Times New Roman" panose="02020603050405020304" pitchFamily="18" charset="0"/>
-              <a:ea typeface="KaiTi" panose="02010609060101010101" pitchFamily="49" charset="-122"/>
-              <a:cs typeface="Times New Roman" panose="02020603050405020304" pitchFamily="18" charset="0"/>
-            </a:endParaRPr>
-          </a:p>
-        </p:txBody>
-      </p:sp>
-      <p:sp>
-        <p:nvSpPr>
-          <p:cNvPr id="5" name="Rounded Rectangle 4">
-            <a:extLst>
-              <a:ext uri="{FF2B5EF4-FFF2-40B4-BE49-F238E27FC236}">
-                <a16:creationId xmlns:a16="http://schemas.microsoft.com/office/drawing/2014/main" id="{A0F7C48F-7391-7C42-A19E-5F73406D9F83}"/>
-              </a:ext>
-            </a:extLst>
-          </p:cNvPr>
-          <p:cNvSpPr/>
-          <p:nvPr/>
-        </p:nvSpPr>
-        <p:spPr>
-          <a:xfrm>
-            <a:off x="829519" y="776253"/>
-            <a:ext cx="10532962" cy="1738347"/>
-          </a:xfrm>
-          <a:prstGeom prst="roundRect">
-            <a:avLst>
-              <a:gd name="adj" fmla="val 6972"/>
-            </a:avLst>
-          </a:prstGeom>
-          <a:solidFill>
-            <a:schemeClr val="accent6">
-              <a:lumMod val="20000"/>
-              <a:lumOff val="80000"/>
-            </a:schemeClr>
-          </a:solidFill>
           <a:ln w="19050">
             <a:solidFill>
               <a:schemeClr val="tx1"/>
-            </a:solidFill>
-          </a:ln>
-          <a:effectLst>
-            <a:outerShdw blurRad="50800" dist="38100" dir="2700000" algn="tl" rotWithShape="0">
-              <a:prstClr val="black">
-                <a:alpha val="40000"/>
-              </a:prstClr>
-            </a:outerShdw>
-          </a:effectLst>
-        </p:spPr>
-        <p:style>
-          <a:lnRef idx="2">
-            <a:schemeClr val="accent1">
-              <a:shade val="50000"/>
-            </a:schemeClr>
-          </a:lnRef>
-          <a:fillRef idx="1">
-            <a:schemeClr val="accent1"/>
-          </a:fillRef>
-          <a:effectRef idx="0">
-            <a:schemeClr val="accent1"/>
-          </a:effectRef>
-          <a:fontRef idx="minor">
-            <a:schemeClr val="lt1"/>
-          </a:fontRef>
-        </p:style>
-        <p:txBody>
-          <a:bodyPr rtlCol="0" anchor="t"/>
-          <a:lstStyle/>
-          <a:p>
-            <a:r>
-              <a:rPr lang="en-US" altLang="zh-CN" b="1" dirty="0">
-                <a:solidFill>
-                  <a:schemeClr val="tx1"/>
-                </a:solidFill>
-                <a:latin typeface="Times New Roman" panose="02020603050405020304" pitchFamily="18" charset="0"/>
-                <a:ea typeface="KaiTi" panose="02010609060101010101" pitchFamily="49" charset="-122"/>
-                <a:cs typeface="Times New Roman" panose="02020603050405020304" pitchFamily="18" charset="0"/>
-              </a:rPr>
-              <a:t>Stock Market: Two Innovative Monetary Policy Tools 💵</a:t>
-            </a:r>
-            <a:endParaRPr lang="en-CN" b="1" i="1" dirty="0">
-              <a:solidFill>
-                <a:srgbClr val="C00000"/>
-              </a:solidFill>
-              <a:latin typeface="Times New Roman" panose="02020603050405020304" pitchFamily="18" charset="0"/>
-              <a:ea typeface="KaiTi" panose="02010609060101010101" pitchFamily="49" charset="-122"/>
-              <a:cs typeface="Times New Roman" panose="02020603050405020304" pitchFamily="18" charset="0"/>
-            </a:endParaRPr>
-          </a:p>
-        </p:txBody>
-      </p:sp>
-      <p:sp>
-        <p:nvSpPr>
-          <p:cNvPr id="6" name="Rounded Rectangle 5">
-            <a:extLst>
-              <a:ext uri="{FF2B5EF4-FFF2-40B4-BE49-F238E27FC236}">
-                <a16:creationId xmlns:a16="http://schemas.microsoft.com/office/drawing/2014/main" id="{C748A44E-4035-8C4C-928E-1038CF78B79B}"/>
-              </a:ext>
-            </a:extLst>
-          </p:cNvPr>
-          <p:cNvSpPr/>
-          <p:nvPr/>
-        </p:nvSpPr>
-        <p:spPr>
-          <a:xfrm>
-            <a:off x="829520" y="2674620"/>
-            <a:ext cx="4436006" cy="2494670"/>
-          </a:xfrm>
-          <a:prstGeom prst="roundRect">
-            <a:avLst>
-              <a:gd name="adj" fmla="val 5574"/>
-            </a:avLst>
-          </a:prstGeom>
-          <a:solidFill>
-            <a:schemeClr val="accent5">
-              <a:lumMod val="20000"/>
-              <a:lumOff val="80000"/>
-            </a:schemeClr>
-          </a:solidFill>
-          <a:ln w="19050">
-            <a:solidFill>
-              <a:schemeClr val="tx1"/>
-            </a:solidFill>
-          </a:ln>
-          <a:effectLst>
-            <a:outerShdw blurRad="50800" dist="38100" dir="2700000" algn="tl" rotWithShape="0">
-              <a:prstClr val="black">
-                <a:alpha val="40000"/>
-              </a:prstClr>
-            </a:outerShdw>
-          </a:effectLst>
-        </p:spPr>
-        <p:style>
-          <a:lnRef idx="2">
-            <a:schemeClr val="accent1">
-              <a:shade val="50000"/>
-            </a:schemeClr>
-          </a:lnRef>
-          <a:fillRef idx="1">
-            <a:schemeClr val="accent1"/>
-          </a:fillRef>
-          <a:effectRef idx="0">
-            <a:schemeClr val="accent1"/>
-          </a:effectRef>
-          <a:fontRef idx="minor">
-            <a:schemeClr val="lt1"/>
-          </a:fontRef>
-        </p:style>
-        <p:txBody>
-          <a:bodyPr rtlCol="0" anchor="t"/>
-          <a:lstStyle/>
-          <a:p>
-            <a:r>
-              <a:rPr lang="en-US" b="1" dirty="0">
-                <a:solidFill>
-                  <a:schemeClr val="tx1"/>
-                </a:solidFill>
-                <a:latin typeface="Times New Roman" panose="02020603050405020304" pitchFamily="18" charset="0"/>
-                <a:ea typeface="KaiTi" panose="02010609060101010101" pitchFamily="49" charset="-122"/>
-                <a:cs typeface="Times New Roman" panose="02020603050405020304" pitchFamily="18" charset="0"/>
-              </a:rPr>
-              <a:t>Money Market</a:t>
-            </a:r>
-            <a:r>
-              <a:rPr lang="zh-CN" altLang="en-US" b="1" dirty="0">
-                <a:solidFill>
-                  <a:schemeClr val="tx1"/>
-                </a:solidFill>
-                <a:latin typeface="Times New Roman" panose="02020603050405020304" pitchFamily="18" charset="0"/>
-                <a:ea typeface="KaiTi" panose="02010609060101010101" pitchFamily="49" charset="-122"/>
-                <a:cs typeface="Times New Roman" panose="02020603050405020304" pitchFamily="18" charset="0"/>
-              </a:rPr>
-              <a:t> </a:t>
-            </a:r>
-            <a:r>
-              <a:rPr lang="en-US" altLang="zh-CN" b="1" dirty="0">
-                <a:solidFill>
-                  <a:schemeClr val="tx1"/>
-                </a:solidFill>
-                <a:latin typeface="Times New Roman" panose="02020603050405020304" pitchFamily="18" charset="0"/>
-                <a:ea typeface="KaiTi" panose="02010609060101010101" pitchFamily="49" charset="-122"/>
-                <a:cs typeface="Times New Roman" panose="02020603050405020304" pitchFamily="18" charset="0"/>
-              </a:rPr>
-              <a:t>💰</a:t>
-            </a:r>
-            <a:endParaRPr lang="en-US" b="1" dirty="0">
-              <a:solidFill>
-                <a:schemeClr val="tx1"/>
-              </a:solidFill>
-              <a:latin typeface="Times New Roman" panose="02020603050405020304" pitchFamily="18" charset="0"/>
-              <a:ea typeface="KaiTi" panose="02010609060101010101" pitchFamily="49" charset="-122"/>
-              <a:cs typeface="Times New Roman" panose="02020603050405020304" pitchFamily="18" charset="0"/>
-            </a:endParaRPr>
-          </a:p>
-        </p:txBody>
-      </p:sp>
-      <p:sp>
-        <p:nvSpPr>
-          <p:cNvPr id="9" name="Rounded Rectangle 8">
-            <a:extLst>
-              <a:ext uri="{FF2B5EF4-FFF2-40B4-BE49-F238E27FC236}">
-                <a16:creationId xmlns:a16="http://schemas.microsoft.com/office/drawing/2014/main" id="{F1A0D57E-F596-244B-A106-8AE1CD07F25D}"/>
-              </a:ext>
-            </a:extLst>
-          </p:cNvPr>
-          <p:cNvSpPr/>
-          <p:nvPr/>
-        </p:nvSpPr>
-        <p:spPr>
-          <a:xfrm>
-            <a:off x="951865" y="1284978"/>
-            <a:ext cx="5079131" cy="1145841"/>
-          </a:xfrm>
-          <a:prstGeom prst="roundRect">
-            <a:avLst>
-              <a:gd name="adj" fmla="val 5837"/>
-            </a:avLst>
-          </a:prstGeom>
-          <a:solidFill>
-            <a:schemeClr val="accent6">
-              <a:lumMod val="40000"/>
-              <a:lumOff val="60000"/>
-            </a:schemeClr>
-          </a:solidFill>
-          <a:ln w="19050">
-            <a:solidFill>
-              <a:schemeClr val="accent6">
-                <a:lumMod val="50000"/>
-              </a:schemeClr>
             </a:solidFill>
           </a:ln>
           <a:effectLst/>
@@ -3697,61 +3396,13 @@
           </a:fontRef>
         </p:style>
         <p:txBody>
-          <a:bodyPr rtlCol="0" anchor="ctr"/>
+          <a:bodyPr rtlCol="0" anchor="t"/>
           <a:lstStyle/>
           <a:p>
-            <a:pPr algn="just"/>
-            <a:r>
-              <a:rPr lang="en-US" sz="1600" b="1" i="1" u="sng" dirty="0">
-                <a:solidFill>
-                  <a:srgbClr val="000000"/>
-                </a:solidFill>
-                <a:effectLst/>
-                <a:latin typeface="Times New Roman" panose="02020603050405020304" pitchFamily="18" charset="0"/>
-                <a:ea typeface="KaiTi" panose="02010609060101010101" pitchFamily="49" charset="-122"/>
-                <a:cs typeface="Times New Roman" panose="02020603050405020304" pitchFamily="18" charset="0"/>
-              </a:rPr>
-              <a:t>SFISF:</a:t>
-            </a:r>
-            <a:r>
-              <a:rPr lang="en-US" sz="1600" b="1" dirty="0">
-                <a:solidFill>
-                  <a:srgbClr val="000000"/>
-                </a:solidFill>
-                <a:effectLst/>
-                <a:latin typeface="Times New Roman" panose="02020603050405020304" pitchFamily="18" charset="0"/>
-                <a:ea typeface="KaiTi" panose="02010609060101010101" pitchFamily="49" charset="-122"/>
-                <a:cs typeface="Times New Roman" panose="02020603050405020304" pitchFamily="18" charset="0"/>
-              </a:rPr>
-              <a:t> </a:t>
-            </a:r>
-            <a:r>
-              <a:rPr lang="en-US" sz="1600" dirty="0">
-                <a:solidFill>
-                  <a:srgbClr val="000000"/>
-                </a:solidFill>
-                <a:effectLst/>
-                <a:latin typeface="Times New Roman" panose="02020603050405020304" pitchFamily="18" charset="0"/>
-                <a:ea typeface="KaiTi" panose="02010609060101010101" pitchFamily="49" charset="-122"/>
-                <a:cs typeface="Times New Roman" panose="02020603050405020304" pitchFamily="18" charset="0"/>
-              </a:rPr>
-              <a:t>Supporting eligible institutions to obtain liquidity from the central bank through asset pledges, with an initial swap facility operation of 500 billion yuan.</a:t>
-            </a:r>
-          </a:p>
-          <a:p>
-            <a:pPr algn="just"/>
-            <a:r>
-              <a:rPr lang="en-US" altLang="zh-CN" sz="1600" b="1" i="1" dirty="0">
-                <a:solidFill>
-                  <a:srgbClr val="C00000"/>
-                </a:solidFill>
-                <a:latin typeface="Times New Roman" panose="02020603050405020304" pitchFamily="18" charset="0"/>
-                <a:ea typeface="KaiTi" panose="02010609060101010101" pitchFamily="49" charset="-122"/>
-                <a:cs typeface="Times New Roman" panose="02020603050405020304" pitchFamily="18" charset="0"/>
-              </a:rPr>
-              <a:t>(I will focus on analyzing this policy)</a:t>
-            </a:r>
-            <a:endParaRPr lang="en-CN" sz="1600" dirty="0">
+            <a:endParaRPr lang="en-CN" b="1" i="1" dirty="0">
+              <a:solidFill>
+                <a:srgbClr val="C00000"/>
+              </a:solidFill>
               <a:latin typeface="Times New Roman" panose="02020603050405020304" pitchFamily="18" charset="0"/>
               <a:ea typeface="KaiTi" panose="02010609060101010101" pitchFamily="49" charset="-122"/>
               <a:cs typeface="Times New Roman" panose="02020603050405020304" pitchFamily="18" charset="0"/>
@@ -3761,298 +3412,737 @@
       </p:sp>
       <p:sp>
         <p:nvSpPr>
-          <p:cNvPr id="11" name="Rounded Rectangle 10">
-            <a:extLst>
-              <a:ext uri="{FF2B5EF4-FFF2-40B4-BE49-F238E27FC236}">
-                <a16:creationId xmlns:a16="http://schemas.microsoft.com/office/drawing/2014/main" id="{377FE554-D6E5-724E-924C-4449E20DBE26}"/>
-              </a:ext>
-            </a:extLst>
-          </p:cNvPr>
-          <p:cNvSpPr/>
+          <p:cNvPr id="28" name="TextBox 27">
+            <a:extLst>
+              <a:ext uri="{FF2B5EF4-FFF2-40B4-BE49-F238E27FC236}">
+                <a16:creationId xmlns:a16="http://schemas.microsoft.com/office/drawing/2014/main" id="{4CA1FA62-82F1-8047-B886-30F408AC79B6}"/>
+              </a:ext>
+            </a:extLst>
+          </p:cNvPr>
+          <p:cNvSpPr txBox="1"/>
           <p:nvPr/>
         </p:nvSpPr>
         <p:spPr>
           <a:xfrm>
-            <a:off x="6161006" y="1284977"/>
-            <a:ext cx="5079133" cy="1145841"/>
+            <a:off x="338560" y="544494"/>
+            <a:ext cx="11514881" cy="369332"/>
           </a:xfrm>
-          <a:prstGeom prst="roundRect">
-            <a:avLst>
-              <a:gd name="adj" fmla="val 5837"/>
-            </a:avLst>
+          <a:prstGeom prst="rect">
+            <a:avLst/>
           </a:prstGeom>
-          <a:solidFill>
-            <a:schemeClr val="accent6">
-              <a:lumMod val="40000"/>
-              <a:lumOff val="60000"/>
-            </a:schemeClr>
-          </a:solidFill>
-          <a:ln w="19050">
+          <a:noFill/>
+        </p:spPr>
+        <p:txBody>
+          <a:bodyPr wrap="square" anchor="ctr">
+            <a:spAutoFit/>
+          </a:bodyPr>
+          <a:lstStyle/>
+          <a:p>
+            <a:pPr algn="ctr"/>
+            <a:r>
+              <a:rPr lang="en-US" sz="1800" b="1" dirty="0">
+                <a:effectLst/>
+                <a:latin typeface="Times New Roman" panose="02020603050405020304" pitchFamily="18" charset="0"/>
+                <a:ea typeface="DengXian" panose="02010600030101010101" pitchFamily="2" charset="-122"/>
+              </a:rPr>
+              <a:t>Guiding Opinions on Regulating the Asset Management Business of Financial Institutions</a:t>
+            </a:r>
+            <a:r>
+              <a:rPr lang="en-CN" b="1" dirty="0">
+                <a:effectLst/>
+              </a:rPr>
+              <a:t> </a:t>
+            </a:r>
+            <a:endParaRPr lang="en-CN" b="1" dirty="0"/>
+          </a:p>
+        </p:txBody>
+      </p:sp>
+      <p:grpSp>
+        <p:nvGrpSpPr>
+          <p:cNvPr id="9" name="Group 8">
+            <a:extLst>
+              <a:ext uri="{FF2B5EF4-FFF2-40B4-BE49-F238E27FC236}">
+                <a16:creationId xmlns:a16="http://schemas.microsoft.com/office/drawing/2014/main" id="{0688A72D-5345-0248-BF3F-2A015F9595EE}"/>
+              </a:ext>
+            </a:extLst>
+          </p:cNvPr>
+          <p:cNvGrpSpPr/>
+          <p:nvPr/>
+        </p:nvGrpSpPr>
+        <p:grpSpPr>
+          <a:xfrm>
+            <a:off x="472439" y="990600"/>
+            <a:ext cx="11247120" cy="1943946"/>
+            <a:chOff x="338558" y="1036320"/>
+            <a:chExt cx="11247120" cy="1943946"/>
+          </a:xfrm>
+        </p:grpSpPr>
+        <p:sp>
+          <p:nvSpPr>
+            <p:cNvPr id="29" name="Rounded Rectangle 28">
+              <a:extLst>
+                <a:ext uri="{FF2B5EF4-FFF2-40B4-BE49-F238E27FC236}">
+                  <a16:creationId xmlns:a16="http://schemas.microsoft.com/office/drawing/2014/main" id="{3AFEA1C6-FEFD-BE4F-9C59-513262665A62}"/>
+                </a:ext>
+              </a:extLst>
+            </p:cNvPr>
+            <p:cNvSpPr/>
+            <p:nvPr/>
+          </p:nvSpPr>
+          <p:spPr>
+            <a:xfrm>
+              <a:off x="338558" y="1036320"/>
+              <a:ext cx="3290361" cy="1943946"/>
+            </a:xfrm>
+            <a:prstGeom prst="roundRect">
+              <a:avLst>
+                <a:gd name="adj" fmla="val 4620"/>
+              </a:avLst>
+            </a:prstGeom>
             <a:solidFill>
               <a:schemeClr val="accent6">
-                <a:lumMod val="50000"/>
+                <a:lumMod val="20000"/>
+                <a:lumOff val="80000"/>
               </a:schemeClr>
             </a:solidFill>
-          </a:ln>
-          <a:effectLst/>
-        </p:spPr>
-        <p:style>
-          <a:lnRef idx="2">
-            <a:schemeClr val="accent1">
-              <a:shade val="50000"/>
-            </a:schemeClr>
-          </a:lnRef>
-          <a:fillRef idx="1">
-            <a:schemeClr val="accent1"/>
-          </a:fillRef>
-          <a:effectRef idx="0">
-            <a:schemeClr val="accent1"/>
-          </a:effectRef>
-          <a:fontRef idx="minor">
-            <a:schemeClr val="lt1"/>
-          </a:fontRef>
-        </p:style>
-        <p:txBody>
-          <a:bodyPr rtlCol="0" anchor="ctr"/>
-          <a:lstStyle/>
-          <a:p>
-            <a:pPr algn="just"/>
-            <a:r>
-              <a:rPr lang="en-US" sz="1600" b="1" i="1" u="sng" dirty="0">
-                <a:solidFill>
-                  <a:srgbClr val="000000"/>
-                </a:solidFill>
-                <a:effectLst/>
-                <a:latin typeface="Times New Roman" panose="02020603050405020304" pitchFamily="18" charset="0"/>
-                <a:ea typeface="KaiTi" panose="02010609060101010101" pitchFamily="49" charset="-122"/>
-                <a:cs typeface="Times New Roman" panose="02020603050405020304" pitchFamily="18" charset="0"/>
-              </a:rPr>
-              <a:t>LFSBIS:</a:t>
-            </a:r>
-            <a:r>
-              <a:rPr lang="en-US" sz="1600" b="1" i="1" dirty="0">
-                <a:solidFill>
-                  <a:srgbClr val="000000"/>
-                </a:solidFill>
-                <a:effectLst/>
-                <a:latin typeface="Times New Roman" panose="02020603050405020304" pitchFamily="18" charset="0"/>
-                <a:ea typeface="KaiTi" panose="02010609060101010101" pitchFamily="49" charset="-122"/>
-                <a:cs typeface="Times New Roman" panose="02020603050405020304" pitchFamily="18" charset="0"/>
-              </a:rPr>
-              <a:t> </a:t>
-            </a:r>
-            <a:r>
-              <a:rPr lang="en-US" sz="1600" dirty="0">
-                <a:solidFill>
-                  <a:srgbClr val="000000"/>
-                </a:solidFill>
-                <a:effectLst/>
-                <a:latin typeface="Times New Roman" panose="02020603050405020304" pitchFamily="18" charset="0"/>
-                <a:ea typeface="KaiTi" panose="02010609060101010101" pitchFamily="49" charset="-122"/>
-                <a:cs typeface="Times New Roman" panose="02020603050405020304" pitchFamily="18" charset="0"/>
-              </a:rPr>
-              <a:t>Guiding commercial banks to provide loans to listed companies and major shareholders to support the repurchase and increase the shareholding of listed companies, with an initial amount of 300 billion yuan. </a:t>
-            </a:r>
-            <a:endParaRPr lang="en-CN" sz="1600" dirty="0">
-              <a:latin typeface="Times New Roman" panose="02020603050405020304" pitchFamily="18" charset="0"/>
-              <a:ea typeface="KaiTi" panose="02010609060101010101" pitchFamily="49" charset="-122"/>
-              <a:cs typeface="Times New Roman" panose="02020603050405020304" pitchFamily="18" charset="0"/>
-            </a:endParaRPr>
-          </a:p>
-        </p:txBody>
-      </p:sp>
-      <p:sp>
-        <p:nvSpPr>
-          <p:cNvPr id="14" name="Rounded Rectangle 13">
-            <a:extLst>
-              <a:ext uri="{FF2B5EF4-FFF2-40B4-BE49-F238E27FC236}">
-                <a16:creationId xmlns:a16="http://schemas.microsoft.com/office/drawing/2014/main" id="{61F2628D-B9FF-BE4C-B1B4-93CD8C682BB4}"/>
-              </a:ext>
-            </a:extLst>
-          </p:cNvPr>
-          <p:cNvSpPr/>
-          <p:nvPr/>
-        </p:nvSpPr>
-        <p:spPr>
-          <a:xfrm>
-            <a:off x="951865" y="3162219"/>
-            <a:ext cx="4180205" cy="1847053"/>
-          </a:xfrm>
-          <a:prstGeom prst="roundRect">
-            <a:avLst>
-              <a:gd name="adj" fmla="val 5837"/>
-            </a:avLst>
-          </a:prstGeom>
-          <a:solidFill>
-            <a:schemeClr val="accent5">
-              <a:lumMod val="40000"/>
-              <a:lumOff val="60000"/>
-            </a:schemeClr>
-          </a:solidFill>
-          <a:ln w="19050">
-            <a:solidFill>
-              <a:schemeClr val="accent5">
-                <a:lumMod val="50000"/>
+            <a:ln w="19050">
+              <a:solidFill>
+                <a:schemeClr val="tx1"/>
+              </a:solidFill>
+            </a:ln>
+            <a:effectLst>
+              <a:outerShdw blurRad="50800" dist="38100" dir="2700000" algn="tl" rotWithShape="0">
+                <a:prstClr val="black">
+                  <a:alpha val="40000"/>
+                </a:prstClr>
+              </a:outerShdw>
+            </a:effectLst>
+          </p:spPr>
+          <p:style>
+            <a:lnRef idx="2">
+              <a:schemeClr val="accent1">
+                <a:shade val="50000"/>
               </a:schemeClr>
-            </a:solidFill>
-          </a:ln>
-          <a:effectLst/>
-        </p:spPr>
-        <p:style>
-          <a:lnRef idx="2">
-            <a:schemeClr val="accent1">
-              <a:shade val="50000"/>
-            </a:schemeClr>
-          </a:lnRef>
-          <a:fillRef idx="1">
-            <a:schemeClr val="accent1"/>
-          </a:fillRef>
-          <a:effectRef idx="0">
-            <a:schemeClr val="accent1"/>
-          </a:effectRef>
-          <a:fontRef idx="minor">
-            <a:schemeClr val="lt1"/>
-          </a:fontRef>
-        </p:style>
-        <p:txBody>
-          <a:bodyPr rtlCol="0" anchor="ctr"/>
-          <a:lstStyle/>
-          <a:p>
-            <a:pPr marL="285750" indent="-285750" algn="just">
-              <a:spcAft>
-                <a:spcPts val="300"/>
-              </a:spcAft>
-              <a:buFont typeface="Wingdings" pitchFamily="2" charset="2"/>
-              <a:buChar char="v"/>
-            </a:pPr>
-            <a:r>
-              <a:rPr lang="en-US" sz="1600" b="1" i="1" u="sng" dirty="0">
+            </a:lnRef>
+            <a:fillRef idx="1">
+              <a:schemeClr val="accent1"/>
+            </a:fillRef>
+            <a:effectRef idx="0">
+              <a:schemeClr val="accent1"/>
+            </a:effectRef>
+            <a:fontRef idx="minor">
+              <a:schemeClr val="lt1"/>
+            </a:fontRef>
+          </p:style>
+          <p:txBody>
+            <a:bodyPr rtlCol="0" anchor="ctr"/>
+            <a:lstStyle/>
+            <a:p>
+              <a:r>
+                <a:rPr lang="en-US" sz="1600" b="1" i="1" dirty="0">
+                  <a:solidFill>
+                    <a:schemeClr val="tx1"/>
+                  </a:solidFill>
+                  <a:latin typeface="Times New Roman" panose="02020603050405020304" pitchFamily="18" charset="0"/>
+                  <a:ea typeface="KaiTi" panose="02010609060101010101" pitchFamily="49" charset="-122"/>
+                  <a:cs typeface="Times New Roman" panose="02020603050405020304" pitchFamily="18" charset="0"/>
+                </a:rPr>
+                <a:t>R</a:t>
+              </a:r>
+              <a:r>
+                <a:rPr lang="en-US" sz="1600" b="1" i="1" dirty="0">
+                  <a:solidFill>
+                    <a:schemeClr val="tx1"/>
+                  </a:solidFill>
+                  <a:effectLst/>
+                  <a:latin typeface="Times New Roman" panose="02020603050405020304" pitchFamily="18" charset="0"/>
+                  <a:ea typeface="KaiTi" panose="02010609060101010101" pitchFamily="49" charset="-122"/>
+                  <a:cs typeface="Times New Roman" panose="02020603050405020304" pitchFamily="18" charset="0"/>
+                </a:rPr>
+                <a:t>egulatory </a:t>
+              </a:r>
+              <a:r>
+                <a:rPr lang="en-US" sz="1600" b="1" i="1" dirty="0">
+                  <a:solidFill>
+                    <a:schemeClr val="tx1"/>
+                  </a:solidFill>
+                  <a:latin typeface="Times New Roman" panose="02020603050405020304" pitchFamily="18" charset="0"/>
+                  <a:ea typeface="KaiTi" panose="02010609060101010101" pitchFamily="49" charset="-122"/>
+                  <a:cs typeface="Times New Roman" panose="02020603050405020304" pitchFamily="18" charset="0"/>
+                </a:rPr>
+                <a:t>P</a:t>
+              </a:r>
+              <a:r>
+                <a:rPr lang="en-US" sz="1600" b="1" i="1" dirty="0">
+                  <a:solidFill>
+                    <a:schemeClr val="tx1"/>
+                  </a:solidFill>
+                  <a:effectLst/>
+                  <a:latin typeface="Times New Roman" panose="02020603050405020304" pitchFamily="18" charset="0"/>
+                  <a:ea typeface="KaiTi" panose="02010609060101010101" pitchFamily="49" charset="-122"/>
+                  <a:cs typeface="Times New Roman" panose="02020603050405020304" pitchFamily="18" charset="0"/>
+                </a:rPr>
+                <a:t>rinciples</a:t>
+              </a:r>
+            </a:p>
+            <a:p>
+              <a:endParaRPr lang="en-US" sz="1600" dirty="0">
                 <a:solidFill>
                   <a:schemeClr val="tx1"/>
                 </a:solidFill>
                 <a:latin typeface="Times New Roman" panose="02020603050405020304" pitchFamily="18" charset="0"/>
                 <a:ea typeface="KaiTi" panose="02010609060101010101" pitchFamily="49" charset="-122"/>
                 <a:cs typeface="Times New Roman" panose="02020603050405020304" pitchFamily="18" charset="0"/>
-              </a:rPr>
-              <a:t>Volume Increase:</a:t>
-            </a:r>
-            <a:r>
-              <a:rPr lang="en-US" sz="1600" dirty="0">
+              </a:endParaRPr>
+            </a:p>
+            <a:p>
+              <a:pPr marL="285750" indent="-285750">
+                <a:buFont typeface="Wingdings" pitchFamily="2" charset="2"/>
+                <a:buChar char="Ø"/>
+              </a:pPr>
+              <a:r>
+                <a:rPr lang="en-US" sz="1600" dirty="0">
+                  <a:solidFill>
+                    <a:schemeClr val="tx1"/>
+                  </a:solidFill>
+                  <a:latin typeface="Times New Roman" panose="02020603050405020304" pitchFamily="18" charset="0"/>
+                  <a:cs typeface="Times New Roman" panose="02020603050405020304" pitchFamily="18" charset="0"/>
+                </a:rPr>
+                <a:t>u</a:t>
+              </a:r>
+              <a:r>
+                <a:rPr lang="en-US" sz="1600" dirty="0">
+                  <a:solidFill>
+                    <a:schemeClr val="tx1"/>
+                  </a:solidFill>
+                  <a:effectLst/>
+                  <a:latin typeface="Times New Roman" panose="02020603050405020304" pitchFamily="18" charset="0"/>
+                  <a:cs typeface="Times New Roman" panose="02020603050405020304" pitchFamily="18" charset="0"/>
+                </a:rPr>
+                <a:t>nified standard</a:t>
+              </a:r>
+            </a:p>
+            <a:p>
+              <a:pPr marL="285750" indent="-285750">
+                <a:buFont typeface="Wingdings" pitchFamily="2" charset="2"/>
+                <a:buChar char="Ø"/>
+              </a:pPr>
+              <a:r>
+                <a:rPr lang="en-US" altLang="zh-CN" sz="1600" dirty="0">
+                  <a:solidFill>
+                    <a:schemeClr val="tx1"/>
+                  </a:solidFill>
+                  <a:latin typeface="Times New Roman" panose="02020603050405020304" pitchFamily="18" charset="0"/>
+                  <a:cs typeface="Times New Roman" panose="02020603050405020304" pitchFamily="18" charset="0"/>
+                </a:rPr>
+                <a:t>b</a:t>
+              </a:r>
+              <a:r>
+                <a:rPr lang="en-US" sz="1600" dirty="0">
+                  <a:solidFill>
+                    <a:schemeClr val="tx1"/>
+                  </a:solidFill>
+                  <a:latin typeface="Times New Roman" panose="02020603050405020304" pitchFamily="18" charset="0"/>
+                  <a:cs typeface="Times New Roman" panose="02020603050405020304" pitchFamily="18" charset="0"/>
+                </a:rPr>
+                <a:t>ehavioral regulation</a:t>
+              </a:r>
+            </a:p>
+            <a:p>
+              <a:pPr marL="285750" indent="-285750">
+                <a:buFont typeface="Wingdings" pitchFamily="2" charset="2"/>
+                <a:buChar char="Ø"/>
+              </a:pPr>
+              <a:r>
+                <a:rPr lang="en-US" sz="1600" b="0" i="0" u="none" strike="noStrike" dirty="0">
+                  <a:solidFill>
+                    <a:schemeClr val="tx1"/>
+                  </a:solidFill>
+                  <a:effectLst/>
+                  <a:latin typeface="Times New Roman" panose="02020603050405020304" pitchFamily="18" charset="0"/>
+                  <a:cs typeface="Times New Roman" panose="02020603050405020304" pitchFamily="18" charset="0"/>
+                </a:rPr>
+                <a:t>look-through</a:t>
+              </a:r>
+              <a:r>
+                <a:rPr lang="en-US" sz="1600" dirty="0">
+                  <a:solidFill>
+                    <a:schemeClr val="tx1"/>
+                  </a:solidFill>
+                  <a:latin typeface="Times New Roman" panose="02020603050405020304" pitchFamily="18" charset="0"/>
+                  <a:cs typeface="Times New Roman" panose="02020603050405020304" pitchFamily="18" charset="0"/>
+                </a:rPr>
+                <a:t> regulation</a:t>
+              </a:r>
+            </a:p>
+            <a:p>
+              <a:pPr marL="285750" indent="-285750">
+                <a:buFont typeface="Wingdings" pitchFamily="2" charset="2"/>
+                <a:buChar char="Ø"/>
+              </a:pPr>
+              <a:r>
+                <a:rPr lang="en-US" altLang="zh-CN" sz="1600" dirty="0">
+                  <a:solidFill>
+                    <a:schemeClr val="tx1"/>
+                  </a:solidFill>
+                  <a:latin typeface="Times New Roman" panose="02020603050405020304" pitchFamily="18" charset="0"/>
+                  <a:cs typeface="Times New Roman" panose="02020603050405020304" pitchFamily="18" charset="0"/>
+                </a:rPr>
+                <a:t>i</a:t>
+              </a:r>
+              <a:r>
+                <a:rPr lang="en-US" sz="1600" dirty="0">
+                  <a:solidFill>
+                    <a:schemeClr val="tx1"/>
+                  </a:solidFill>
+                  <a:latin typeface="Times New Roman" panose="02020603050405020304" pitchFamily="18" charset="0"/>
+                  <a:cs typeface="Times New Roman" panose="02020603050405020304" pitchFamily="18" charset="0"/>
+                </a:rPr>
+                <a:t>ntegrated statistics</a:t>
+              </a:r>
+            </a:p>
+            <a:p>
+              <a:pPr marL="285750" indent="-285750">
+                <a:buFont typeface="Wingdings" pitchFamily="2" charset="2"/>
+                <a:buChar char="Ø"/>
+              </a:pPr>
+              <a:r>
+                <a:rPr lang="en-US" sz="1600" b="0" i="0" u="none" strike="noStrike" dirty="0">
+                  <a:solidFill>
+                    <a:schemeClr val="tx1"/>
+                  </a:solidFill>
+                  <a:effectLst/>
+                  <a:latin typeface="Times New Roman" panose="02020603050405020304" pitchFamily="18" charset="0"/>
+                  <a:cs typeface="Times New Roman" panose="02020603050405020304" pitchFamily="18" charset="0"/>
+                </a:rPr>
+                <a:t>non-retroactive </a:t>
+              </a:r>
+              <a:endParaRPr lang="en-US" sz="1600" dirty="0">
+                <a:solidFill>
+                  <a:schemeClr val="tx1"/>
+                </a:solidFill>
+                <a:latin typeface="Times New Roman" panose="02020603050405020304" pitchFamily="18" charset="0"/>
+                <a:cs typeface="Times New Roman" panose="02020603050405020304" pitchFamily="18" charset="0"/>
+              </a:endParaRPr>
+            </a:p>
+          </p:txBody>
+        </p:sp>
+        <p:sp>
+          <p:nvSpPr>
+            <p:cNvPr id="31" name="Rounded Rectangle 30">
+              <a:extLst>
+                <a:ext uri="{FF2B5EF4-FFF2-40B4-BE49-F238E27FC236}">
+                  <a16:creationId xmlns:a16="http://schemas.microsoft.com/office/drawing/2014/main" id="{89282767-0478-B843-BA8B-331F792EE24F}"/>
+                </a:ext>
+              </a:extLst>
+            </p:cNvPr>
+            <p:cNvSpPr/>
+            <p:nvPr/>
+          </p:nvSpPr>
+          <p:spPr>
+            <a:xfrm>
+              <a:off x="3744280" y="1036320"/>
+              <a:ext cx="7841398" cy="1943946"/>
+            </a:xfrm>
+            <a:prstGeom prst="roundRect">
+              <a:avLst>
+                <a:gd name="adj" fmla="val 2268"/>
+              </a:avLst>
+            </a:prstGeom>
+            <a:solidFill>
+              <a:schemeClr val="accent5">
+                <a:lumMod val="20000"/>
+                <a:lumOff val="80000"/>
+              </a:schemeClr>
+            </a:solidFill>
+            <a:ln w="19050">
+              <a:solidFill>
+                <a:schemeClr val="tx1"/>
+              </a:solidFill>
+            </a:ln>
+            <a:effectLst>
+              <a:outerShdw blurRad="50800" dist="38100" dir="2700000" algn="tl" rotWithShape="0">
+                <a:prstClr val="black">
+                  <a:alpha val="40000"/>
+                </a:prstClr>
+              </a:outerShdw>
+            </a:effectLst>
+          </p:spPr>
+          <p:style>
+            <a:lnRef idx="2">
+              <a:schemeClr val="accent1">
+                <a:shade val="50000"/>
+              </a:schemeClr>
+            </a:lnRef>
+            <a:fillRef idx="1">
+              <a:schemeClr val="accent1"/>
+            </a:fillRef>
+            <a:effectRef idx="0">
+              <a:schemeClr val="accent1"/>
+            </a:effectRef>
+            <a:fontRef idx="minor">
+              <a:schemeClr val="lt1"/>
+            </a:fontRef>
+          </p:style>
+          <p:txBody>
+            <a:bodyPr rtlCol="0" anchor="t"/>
+            <a:lstStyle/>
+            <a:p>
+              <a:r>
+                <a:rPr lang="en-US" sz="1600" b="1" i="1" dirty="0">
+                  <a:solidFill>
+                    <a:schemeClr val="tx1"/>
+                  </a:solidFill>
+                  <a:effectLst/>
+                  <a:latin typeface="Times New Roman" panose="02020603050405020304" pitchFamily="18" charset="0"/>
+                  <a:ea typeface="KaiTi" panose="02010609060101010101" pitchFamily="49" charset="-122"/>
+                  <a:cs typeface="Times New Roman" panose="02020603050405020304" pitchFamily="18" charset="0"/>
+                </a:rPr>
+                <a:t>Regulatory Objects</a:t>
+              </a:r>
+              <a:endParaRPr lang="en-US" sz="1600" dirty="0">
                 <a:solidFill>
                   <a:schemeClr val="tx1"/>
                 </a:solidFill>
                 <a:latin typeface="Times New Roman" panose="02020603050405020304" pitchFamily="18" charset="0"/>
                 <a:ea typeface="KaiTi" panose="02010609060101010101" pitchFamily="49" charset="-122"/>
                 <a:cs typeface="Times New Roman" panose="02020603050405020304" pitchFamily="18" charset="0"/>
-              </a:rPr>
-              <a:t> RRR</a:t>
-            </a:r>
-            <a:r>
-              <a:rPr lang="zh-CN" altLang="en-US" sz="1600" dirty="0">
+              </a:endParaRPr>
+            </a:p>
+          </p:txBody>
+        </p:sp>
+        <p:sp>
+          <p:nvSpPr>
+            <p:cNvPr id="33" name="Rounded Rectangle 32">
+              <a:extLst>
+                <a:ext uri="{FF2B5EF4-FFF2-40B4-BE49-F238E27FC236}">
+                  <a16:creationId xmlns:a16="http://schemas.microsoft.com/office/drawing/2014/main" id="{0ABFFDC3-CC91-7745-A14C-803F972A081F}"/>
+                </a:ext>
+              </a:extLst>
+            </p:cNvPr>
+            <p:cNvSpPr/>
+            <p:nvPr/>
+          </p:nvSpPr>
+          <p:spPr>
+            <a:xfrm>
+              <a:off x="3864024" y="1627021"/>
+              <a:ext cx="2616254" cy="1143001"/>
+            </a:xfrm>
+            <a:prstGeom prst="roundRect">
+              <a:avLst>
+                <a:gd name="adj" fmla="val 6972"/>
+              </a:avLst>
+            </a:prstGeom>
+            <a:solidFill>
+              <a:schemeClr val="accent5">
+                <a:lumMod val="40000"/>
+                <a:lumOff val="60000"/>
+              </a:schemeClr>
+            </a:solidFill>
+            <a:ln w="12700">
+              <a:solidFill>
+                <a:schemeClr val="tx1"/>
+              </a:solidFill>
+            </a:ln>
+            <a:effectLst/>
+          </p:spPr>
+          <p:style>
+            <a:lnRef idx="2">
+              <a:schemeClr val="accent1">
+                <a:shade val="50000"/>
+              </a:schemeClr>
+            </a:lnRef>
+            <a:fillRef idx="1">
+              <a:schemeClr val="accent1"/>
+            </a:fillRef>
+            <a:effectRef idx="0">
+              <a:schemeClr val="accent1"/>
+            </a:effectRef>
+            <a:fontRef idx="minor">
+              <a:schemeClr val="lt1"/>
+            </a:fontRef>
+          </p:style>
+          <p:txBody>
+            <a:bodyPr rtlCol="0" anchor="t"/>
+            <a:lstStyle/>
+            <a:p>
+              <a:r>
+                <a:rPr lang="en-US" sz="1600" i="1" u="sng" dirty="0">
+                  <a:solidFill>
+                    <a:schemeClr val="tx1"/>
+                  </a:solidFill>
+                  <a:effectLst/>
+                  <a:latin typeface="Times New Roman" panose="02020603050405020304" pitchFamily="18" charset="0"/>
+                  <a:ea typeface="KaiTi" panose="02010609060101010101" pitchFamily="49" charset="-122"/>
+                  <a:cs typeface="Times New Roman" panose="02020603050405020304" pitchFamily="18" charset="0"/>
+                </a:rPr>
+                <a:t>Asset Management</a:t>
+              </a:r>
+              <a:r>
+                <a:rPr lang="zh-CN" altLang="en-US" sz="1600" i="1" u="sng" dirty="0">
+                  <a:solidFill>
+                    <a:schemeClr val="tx1"/>
+                  </a:solidFill>
+                  <a:effectLst/>
+                  <a:latin typeface="Times New Roman" panose="02020603050405020304" pitchFamily="18" charset="0"/>
+                  <a:ea typeface="KaiTi" panose="02010609060101010101" pitchFamily="49" charset="-122"/>
+                  <a:cs typeface="Times New Roman" panose="02020603050405020304" pitchFamily="18" charset="0"/>
+                </a:rPr>
+                <a:t> </a:t>
+              </a:r>
+              <a:r>
+                <a:rPr lang="en-US" altLang="zh-CN" sz="1600" i="1" u="sng" dirty="0">
+                  <a:solidFill>
+                    <a:schemeClr val="tx1"/>
+                  </a:solidFill>
+                  <a:effectLst/>
+                  <a:latin typeface="Times New Roman" panose="02020603050405020304" pitchFamily="18" charset="0"/>
+                  <a:ea typeface="KaiTi" panose="02010609060101010101" pitchFamily="49" charset="-122"/>
+                  <a:cs typeface="Times New Roman" panose="02020603050405020304" pitchFamily="18" charset="0"/>
+                </a:rPr>
+                <a:t>Business</a:t>
+              </a:r>
+              <a:endParaRPr lang="en-US" sz="1600" i="1" u="sng" dirty="0">
+                <a:solidFill>
+                  <a:schemeClr val="tx1"/>
+                </a:solidFill>
+                <a:effectLst/>
+                <a:latin typeface="Times New Roman" panose="02020603050405020304" pitchFamily="18" charset="0"/>
+                <a:ea typeface="KaiTi" panose="02010609060101010101" pitchFamily="49" charset="-122"/>
+                <a:cs typeface="Times New Roman" panose="02020603050405020304" pitchFamily="18" charset="0"/>
+              </a:endParaRPr>
+            </a:p>
+            <a:p>
+              <a:endParaRPr lang="en-US" sz="1600" b="1" i="1" dirty="0">
                 <a:solidFill>
                   <a:schemeClr val="tx1"/>
                 </a:solidFill>
                 <a:latin typeface="Times New Roman" panose="02020603050405020304" pitchFamily="18" charset="0"/>
                 <a:ea typeface="KaiTi" panose="02010609060101010101" pitchFamily="49" charset="-122"/>
                 <a:cs typeface="Times New Roman" panose="02020603050405020304" pitchFamily="18" charset="0"/>
-              </a:rPr>
-              <a:t> </a:t>
-            </a:r>
-            <a:r>
-              <a:rPr lang="en-US" sz="1600" dirty="0">
+              </a:endParaRPr>
+            </a:p>
+            <a:p>
+              <a:r>
+                <a:rPr lang="en-US" sz="1600" dirty="0">
+                  <a:solidFill>
+                    <a:schemeClr val="tx1"/>
+                  </a:solidFill>
+                  <a:latin typeface="Times New Roman" panose="02020603050405020304" pitchFamily="18" charset="0"/>
+                  <a:ea typeface="KaiTi" panose="02010609060101010101" pitchFamily="49" charset="-122"/>
+                  <a:cs typeface="Times New Roman" panose="02020603050405020304" pitchFamily="18" charset="0"/>
+                </a:rPr>
+                <a:t>off-balance sheet operations of financial institutions</a:t>
+              </a:r>
+            </a:p>
+          </p:txBody>
+        </p:sp>
+        <p:sp>
+          <p:nvSpPr>
+            <p:cNvPr id="34" name="Rounded Rectangle 33">
+              <a:extLst>
+                <a:ext uri="{FF2B5EF4-FFF2-40B4-BE49-F238E27FC236}">
+                  <a16:creationId xmlns:a16="http://schemas.microsoft.com/office/drawing/2014/main" id="{070C6017-3C4A-9549-847D-E0036243355B}"/>
+                </a:ext>
+              </a:extLst>
+            </p:cNvPr>
+            <p:cNvSpPr/>
+            <p:nvPr/>
+          </p:nvSpPr>
+          <p:spPr>
+            <a:xfrm>
+              <a:off x="6641764" y="1627021"/>
+              <a:ext cx="4821994" cy="1143001"/>
+            </a:xfrm>
+            <a:prstGeom prst="roundRect">
+              <a:avLst>
+                <a:gd name="adj" fmla="val 6972"/>
+              </a:avLst>
+            </a:prstGeom>
+            <a:solidFill>
+              <a:schemeClr val="accent5">
+                <a:lumMod val="40000"/>
+                <a:lumOff val="60000"/>
+              </a:schemeClr>
+            </a:solidFill>
+            <a:ln w="12700">
+              <a:solidFill>
+                <a:schemeClr val="tx1"/>
+              </a:solidFill>
+            </a:ln>
+            <a:effectLst/>
+          </p:spPr>
+          <p:style>
+            <a:lnRef idx="2">
+              <a:schemeClr val="accent1">
+                <a:shade val="50000"/>
+              </a:schemeClr>
+            </a:lnRef>
+            <a:fillRef idx="1">
+              <a:schemeClr val="accent1"/>
+            </a:fillRef>
+            <a:effectRef idx="0">
+              <a:schemeClr val="accent1"/>
+            </a:effectRef>
+            <a:fontRef idx="minor">
+              <a:schemeClr val="lt1"/>
+            </a:fontRef>
+          </p:style>
+          <p:txBody>
+            <a:bodyPr rtlCol="0" anchor="t"/>
+            <a:lstStyle/>
+            <a:p>
+              <a:r>
+                <a:rPr lang="en-US" sz="1600" i="1" u="sng" dirty="0">
+                  <a:solidFill>
+                    <a:schemeClr val="tx1"/>
+                  </a:solidFill>
+                  <a:latin typeface="Times New Roman" panose="02020603050405020304" pitchFamily="18" charset="0"/>
+                  <a:ea typeface="KaiTi" panose="02010609060101010101" pitchFamily="49" charset="-122"/>
+                  <a:cs typeface="Times New Roman" panose="02020603050405020304" pitchFamily="18" charset="0"/>
+                </a:rPr>
+                <a:t>A</a:t>
+              </a:r>
+              <a:r>
+                <a:rPr lang="en-US" sz="1600" i="1" u="sng" dirty="0">
+                  <a:solidFill>
+                    <a:schemeClr val="tx1"/>
+                  </a:solidFill>
+                  <a:effectLst/>
+                  <a:latin typeface="Times New Roman" panose="02020603050405020304" pitchFamily="18" charset="0"/>
+                  <a:ea typeface="KaiTi" panose="02010609060101010101" pitchFamily="49" charset="-122"/>
+                  <a:cs typeface="Times New Roman" panose="02020603050405020304" pitchFamily="18" charset="0"/>
+                </a:rPr>
+                <a:t>sset </a:t>
+              </a:r>
+              <a:r>
+                <a:rPr lang="en-US" sz="1600" i="1" u="sng" dirty="0">
+                  <a:solidFill>
+                    <a:schemeClr val="tx1"/>
+                  </a:solidFill>
+                  <a:latin typeface="Times New Roman" panose="02020603050405020304" pitchFamily="18" charset="0"/>
+                  <a:ea typeface="KaiTi" panose="02010609060101010101" pitchFamily="49" charset="-122"/>
+                  <a:cs typeface="Times New Roman" panose="02020603050405020304" pitchFamily="18" charset="0"/>
+                </a:rPr>
+                <a:t>M</a:t>
+              </a:r>
+              <a:r>
+                <a:rPr lang="en-US" sz="1600" i="1" u="sng" dirty="0">
+                  <a:solidFill>
+                    <a:schemeClr val="tx1"/>
+                  </a:solidFill>
+                  <a:effectLst/>
+                  <a:latin typeface="Times New Roman" panose="02020603050405020304" pitchFamily="18" charset="0"/>
+                  <a:ea typeface="KaiTi" panose="02010609060101010101" pitchFamily="49" charset="-122"/>
+                  <a:cs typeface="Times New Roman" panose="02020603050405020304" pitchFamily="18" charset="0"/>
+                </a:rPr>
+                <a:t>anagement </a:t>
+              </a:r>
+              <a:r>
+                <a:rPr lang="en-US" sz="1600" i="1" u="sng" dirty="0">
+                  <a:solidFill>
+                    <a:schemeClr val="tx1"/>
+                  </a:solidFill>
+                  <a:latin typeface="Times New Roman" panose="02020603050405020304" pitchFamily="18" charset="0"/>
+                  <a:ea typeface="KaiTi" panose="02010609060101010101" pitchFamily="49" charset="-122"/>
+                  <a:cs typeface="Times New Roman" panose="02020603050405020304" pitchFamily="18" charset="0"/>
+                </a:rPr>
+                <a:t>P</a:t>
+              </a:r>
+              <a:r>
+                <a:rPr lang="en-US" sz="1600" i="1" u="sng" dirty="0">
+                  <a:solidFill>
+                    <a:schemeClr val="tx1"/>
+                  </a:solidFill>
+                  <a:effectLst/>
+                  <a:latin typeface="Times New Roman" panose="02020603050405020304" pitchFamily="18" charset="0"/>
+                  <a:ea typeface="KaiTi" panose="02010609060101010101" pitchFamily="49" charset="-122"/>
+                  <a:cs typeface="Times New Roman" panose="02020603050405020304" pitchFamily="18" charset="0"/>
+                </a:rPr>
+                <a:t>roduct</a:t>
+              </a:r>
+            </a:p>
+            <a:p>
+              <a:pPr marL="285750" indent="-285750">
+                <a:buFont typeface="Wingdings" pitchFamily="2" charset="2"/>
+                <a:buChar char="Ø"/>
+              </a:pPr>
+              <a:r>
+                <a:rPr lang="en-US" altLang="zh-CN" sz="1600" dirty="0">
+                  <a:solidFill>
+                    <a:schemeClr val="tx1"/>
+                  </a:solidFill>
+                  <a:latin typeface="Times New Roman" panose="02020603050405020304" pitchFamily="18" charset="0"/>
+                  <a:ea typeface="KaiTi" panose="02010609060101010101" pitchFamily="49" charset="-122"/>
+                  <a:cs typeface="Times New Roman" panose="02020603050405020304" pitchFamily="18" charset="0"/>
+                </a:rPr>
+                <a:t>f</a:t>
+              </a:r>
+              <a:r>
+                <a:rPr lang="en-US" sz="1600" dirty="0">
+                  <a:solidFill>
+                    <a:schemeClr val="tx1"/>
+                  </a:solidFill>
+                  <a:latin typeface="Times New Roman" panose="02020603050405020304" pitchFamily="18" charset="0"/>
+                  <a:ea typeface="KaiTi" panose="02010609060101010101" pitchFamily="49" charset="-122"/>
+                  <a:cs typeface="Times New Roman" panose="02020603050405020304" pitchFamily="18" charset="0"/>
+                </a:rPr>
+                <a:t>unding method: public and private</a:t>
+              </a:r>
+            </a:p>
+            <a:p>
+              <a:pPr marL="285750" indent="-285750">
+                <a:buFont typeface="Wingdings" pitchFamily="2" charset="2"/>
+                <a:buChar char="Ø"/>
+              </a:pPr>
+              <a:r>
+                <a:rPr lang="en-US" sz="1600" dirty="0">
+                  <a:solidFill>
+                    <a:schemeClr val="tx1"/>
+                  </a:solidFill>
+                  <a:latin typeface="Times New Roman" panose="02020603050405020304" pitchFamily="18" charset="0"/>
+                  <a:ea typeface="KaiTi" panose="02010609060101010101" pitchFamily="49" charset="-122"/>
+                  <a:cs typeface="Times New Roman" panose="02020603050405020304" pitchFamily="18" charset="0"/>
+                </a:rPr>
+                <a:t>investment nature: fixed income, equity, hybrid, etc.</a:t>
+              </a:r>
+            </a:p>
+            <a:p>
+              <a:pPr marL="285750" indent="-285750">
+                <a:buFont typeface="Wingdings" pitchFamily="2" charset="2"/>
+                <a:buChar char="Ø"/>
+              </a:pPr>
+              <a:r>
+                <a:rPr lang="en-US" sz="1600" dirty="0">
+                  <a:solidFill>
+                    <a:schemeClr val="tx1"/>
+                  </a:solidFill>
+                  <a:latin typeface="Times New Roman" panose="02020603050405020304" pitchFamily="18" charset="0"/>
+                  <a:ea typeface="KaiTi" panose="02010609060101010101" pitchFamily="49" charset="-122"/>
+                  <a:cs typeface="Times New Roman" panose="02020603050405020304" pitchFamily="18" charset="0"/>
+                </a:rPr>
+                <a:t>mode of operation: open, closed</a:t>
+              </a:r>
+            </a:p>
+            <a:p>
+              <a:endParaRPr lang="en-US" sz="1600" dirty="0">
                 <a:solidFill>
                   <a:schemeClr val="tx1"/>
                 </a:solidFill>
                 <a:latin typeface="Times New Roman" panose="02020603050405020304" pitchFamily="18" charset="0"/>
                 <a:ea typeface="KaiTi" panose="02010609060101010101" pitchFamily="49" charset="-122"/>
                 <a:cs typeface="Times New Roman" panose="02020603050405020304" pitchFamily="18" charset="0"/>
-              </a:rPr>
-              <a:t>cut by 50 bp, releasing liquidity of around 1 trillion, with a possible second cut of 25-50 bp in </a:t>
-            </a:r>
-            <a:r>
-              <a:rPr lang="en-US" altLang="zh-CN" sz="1600" dirty="0">
-                <a:solidFill>
-                  <a:schemeClr val="tx1"/>
-                </a:solidFill>
-                <a:latin typeface="Times New Roman" panose="02020603050405020304" pitchFamily="18" charset="0"/>
-                <a:ea typeface="KaiTi" panose="02010609060101010101" pitchFamily="49" charset="-122"/>
-                <a:cs typeface="Times New Roman" panose="02020603050405020304" pitchFamily="18" charset="0"/>
-              </a:rPr>
-              <a:t>2024</a:t>
-            </a:r>
-            <a:r>
-              <a:rPr lang="en-US" sz="1600" dirty="0">
-                <a:solidFill>
-                  <a:schemeClr val="tx1"/>
-                </a:solidFill>
-                <a:latin typeface="Times New Roman" panose="02020603050405020304" pitchFamily="18" charset="0"/>
-                <a:ea typeface="KaiTi" panose="02010609060101010101" pitchFamily="49" charset="-122"/>
-                <a:cs typeface="Times New Roman" panose="02020603050405020304" pitchFamily="18" charset="0"/>
-              </a:rPr>
-              <a:t>.</a:t>
-            </a:r>
-          </a:p>
-          <a:p>
-            <a:pPr marL="285750" indent="-285750" algn="just">
-              <a:spcAft>
-                <a:spcPts val="300"/>
-              </a:spcAft>
-              <a:buFont typeface="Wingdings" pitchFamily="2" charset="2"/>
-              <a:buChar char="v"/>
-            </a:pPr>
-            <a:r>
-              <a:rPr lang="en-US" altLang="zh-CN" sz="1600" b="1" i="1" u="sng" dirty="0">
-                <a:solidFill>
-                  <a:schemeClr val="tx1"/>
-                </a:solidFill>
-                <a:latin typeface="Times New Roman" panose="02020603050405020304" pitchFamily="18" charset="0"/>
-                <a:ea typeface="KaiTi" panose="02010609060101010101" pitchFamily="49" charset="-122"/>
-                <a:cs typeface="Times New Roman" panose="02020603050405020304" pitchFamily="18" charset="0"/>
-              </a:rPr>
-              <a:t>Price</a:t>
-            </a:r>
-            <a:r>
-              <a:rPr lang="zh-CN" altLang="en-US" sz="1600" b="1" i="1" u="sng" dirty="0">
-                <a:solidFill>
-                  <a:schemeClr val="tx1"/>
-                </a:solidFill>
-                <a:latin typeface="Times New Roman" panose="02020603050405020304" pitchFamily="18" charset="0"/>
-                <a:ea typeface="KaiTi" panose="02010609060101010101" pitchFamily="49" charset="-122"/>
-                <a:cs typeface="Times New Roman" panose="02020603050405020304" pitchFamily="18" charset="0"/>
-              </a:rPr>
-              <a:t> </a:t>
-            </a:r>
-            <a:r>
-              <a:rPr lang="en-US" altLang="zh-CN" sz="1600" b="1" i="1" u="sng" dirty="0">
-                <a:solidFill>
-                  <a:schemeClr val="tx1"/>
-                </a:solidFill>
-                <a:latin typeface="Times New Roman" panose="02020603050405020304" pitchFamily="18" charset="0"/>
-                <a:ea typeface="KaiTi" panose="02010609060101010101" pitchFamily="49" charset="-122"/>
-                <a:cs typeface="Times New Roman" panose="02020603050405020304" pitchFamily="18" charset="0"/>
-              </a:rPr>
-              <a:t>Decrease:</a:t>
-            </a:r>
-            <a:r>
-              <a:rPr lang="en-US" altLang="zh-CN" sz="1600" dirty="0">
-                <a:solidFill>
-                  <a:schemeClr val="tx1"/>
-                </a:solidFill>
-                <a:latin typeface="Times New Roman" panose="02020603050405020304" pitchFamily="18" charset="0"/>
-                <a:ea typeface="KaiTi" panose="02010609060101010101" pitchFamily="49" charset="-122"/>
-                <a:cs typeface="Times New Roman" panose="02020603050405020304" pitchFamily="18" charset="0"/>
-              </a:rPr>
-              <a:t> 7-day reverse repo rate cut by 20bp to 1.5%, MLF rate cut by 30bp to 2.0%, LPR and deposit rate cut by 20~25bp.</a:t>
-            </a:r>
-          </a:p>
-        </p:txBody>
-      </p:sp>
-      <p:sp>
-        <p:nvSpPr>
-          <p:cNvPr id="15" name="Rounded Rectangle 14">
-            <a:extLst>
-              <a:ext uri="{FF2B5EF4-FFF2-40B4-BE49-F238E27FC236}">
-                <a16:creationId xmlns:a16="http://schemas.microsoft.com/office/drawing/2014/main" id="{ACF74B08-0AC4-034B-A9E6-3C9660530D20}"/>
+              </a:endParaRPr>
+            </a:p>
+          </p:txBody>
+        </p:sp>
+      </p:grpSp>
+      <p:sp>
+        <p:nvSpPr>
+          <p:cNvPr id="35" name="Rounded Rectangle 34">
+            <a:extLst>
+              <a:ext uri="{FF2B5EF4-FFF2-40B4-BE49-F238E27FC236}">
+                <a16:creationId xmlns:a16="http://schemas.microsoft.com/office/drawing/2014/main" id="{407FA478-AB0D-1548-9076-11192A27416B}"/>
               </a:ext>
             </a:extLst>
           </p:cNvPr>
@@ -4061,12 +4151,12 @@
         </p:nvSpPr>
         <p:spPr>
           <a:xfrm>
-            <a:off x="5381837" y="2674619"/>
-            <a:ext cx="5980643" cy="3509011"/>
+            <a:off x="472439" y="3077311"/>
+            <a:ext cx="11247120" cy="3155849"/>
           </a:xfrm>
           <a:prstGeom prst="roundRect">
             <a:avLst>
-              <a:gd name="adj" fmla="val 5574"/>
+              <a:gd name="adj" fmla="val 2677"/>
             </a:avLst>
           </a:prstGeom>
           <a:solidFill>
@@ -4109,7 +4199,7 @@
           <a:lstStyle/>
           <a:p>
             <a:r>
-              <a:rPr lang="en-US" b="1" dirty="0">
+              <a:rPr lang="en-US" sz="1600" b="1" i="1" dirty="0">
                 <a:solidFill>
                   <a:schemeClr val="tx1"/>
                 </a:solidFill>
@@ -4117,31 +4207,11 @@
                 <a:ea typeface="KaiTi" panose="02010609060101010101" pitchFamily="49" charset="-122"/>
                 <a:cs typeface="Times New Roman" panose="02020603050405020304" pitchFamily="18" charset="0"/>
               </a:rPr>
-              <a:t>Real Estate Market</a:t>
-            </a:r>
-            <a:r>
-              <a:rPr lang="zh-CN" altLang="en-US" b="1" dirty="0">
-                <a:solidFill>
-                  <a:schemeClr val="tx1"/>
-                </a:solidFill>
-                <a:latin typeface="Times New Roman" panose="02020603050405020304" pitchFamily="18" charset="0"/>
-                <a:ea typeface="KaiTi" panose="02010609060101010101" pitchFamily="49" charset="-122"/>
-                <a:cs typeface="Times New Roman" panose="02020603050405020304" pitchFamily="18" charset="0"/>
-              </a:rPr>
-              <a:t> </a:t>
-            </a:r>
-            <a:r>
-              <a:rPr lang="en-US" altLang="zh-CN" b="1" dirty="0">
-                <a:solidFill>
-                  <a:schemeClr val="tx1"/>
-                </a:solidFill>
-                <a:latin typeface="Times New Roman" panose="02020603050405020304" pitchFamily="18" charset="0"/>
-                <a:ea typeface="KaiTi" panose="02010609060101010101" pitchFamily="49" charset="-122"/>
-                <a:cs typeface="Times New Roman" panose="02020603050405020304" pitchFamily="18" charset="0"/>
-              </a:rPr>
-              <a:t>🏠</a:t>
-            </a:r>
-            <a:endParaRPr lang="en-US" b="1" dirty="0">
+              <a:t>Regulatory Requirement</a:t>
+            </a:r>
+          </a:p>
+          <a:p>
+            <a:endParaRPr lang="en-US" sz="1600" b="1" i="1" dirty="0">
               <a:solidFill>
                 <a:schemeClr val="tx1"/>
               </a:solidFill>
@@ -4150,14 +4220,34 @@
               <a:cs typeface="Times New Roman" panose="02020603050405020304" pitchFamily="18" charset="0"/>
             </a:endParaRPr>
           </a:p>
-        </p:txBody>
-      </p:sp>
-      <p:sp>
-        <p:nvSpPr>
-          <p:cNvPr id="16" name="Rounded Rectangle 15">
-            <a:extLst>
-              <a:ext uri="{FF2B5EF4-FFF2-40B4-BE49-F238E27FC236}">
-                <a16:creationId xmlns:a16="http://schemas.microsoft.com/office/drawing/2014/main" id="{2527A65A-DCE5-574D-B286-58A445C7D0BA}"/>
+          <a:p>
+            <a:endParaRPr lang="en-US" sz="1600" dirty="0">
+              <a:solidFill>
+                <a:schemeClr val="tx1"/>
+              </a:solidFill>
+              <a:latin typeface="Times New Roman" panose="02020603050405020304" pitchFamily="18" charset="0"/>
+              <a:ea typeface="KaiTi" panose="02010609060101010101" pitchFamily="49" charset="-122"/>
+              <a:cs typeface="Times New Roman" panose="02020603050405020304" pitchFamily="18" charset="0"/>
+            </a:endParaRPr>
+          </a:p>
+          <a:p>
+            <a:endParaRPr lang="en-US" sz="1600" b="1" dirty="0">
+              <a:solidFill>
+                <a:schemeClr val="tx1"/>
+              </a:solidFill>
+              <a:latin typeface="Times New Roman" panose="02020603050405020304" pitchFamily="18" charset="0"/>
+              <a:ea typeface="KaiTi" panose="02010609060101010101" pitchFamily="49" charset="-122"/>
+              <a:cs typeface="Times New Roman" panose="02020603050405020304" pitchFamily="18" charset="0"/>
+            </a:endParaRPr>
+          </a:p>
+        </p:txBody>
+      </p:sp>
+      <p:sp>
+        <p:nvSpPr>
+          <p:cNvPr id="36" name="Rounded Rectangle 35">
+            <a:extLst>
+              <a:ext uri="{FF2B5EF4-FFF2-40B4-BE49-F238E27FC236}">
+                <a16:creationId xmlns:a16="http://schemas.microsoft.com/office/drawing/2014/main" id="{B1B6027C-3D87-4448-BE37-58C33700ED62}"/>
               </a:ext>
             </a:extLst>
           </p:cNvPr>
@@ -4166,12 +4256,12 @@
         </p:nvSpPr>
         <p:spPr>
           <a:xfrm>
-            <a:off x="5474812" y="3162219"/>
-            <a:ext cx="5759768" cy="2877700"/>
+            <a:off x="631600" y="3512235"/>
+            <a:ext cx="4042000" cy="2540694"/>
           </a:xfrm>
           <a:prstGeom prst="roundRect">
             <a:avLst>
-              <a:gd name="adj" fmla="val 5837"/>
+              <a:gd name="adj" fmla="val 3165"/>
             </a:avLst>
           </a:prstGeom>
           <a:solidFill>
@@ -4180,11 +4270,9 @@
               <a:lumOff val="60000"/>
             </a:schemeClr>
           </a:solidFill>
-          <a:ln w="19050">
+          <a:ln w="12700">
             <a:solidFill>
-              <a:schemeClr val="accent2">
-                <a:lumMod val="50000"/>
-              </a:schemeClr>
+              <a:schemeClr val="tx1"/>
             </a:solidFill>
           </a:ln>
           <a:effectLst/>
@@ -4209,15 +4297,8 @@
           <a:bodyPr rtlCol="0" anchor="ctr"/>
           <a:lstStyle/>
           <a:p>
-            <a:pPr marL="285750" indent="-285750" algn="just">
-              <a:spcAft>
-                <a:spcPts val="300"/>
-              </a:spcAft>
-              <a:buFont typeface="Wingdings" pitchFamily="2" charset="2"/>
-              <a:buChar char="v"/>
-            </a:pPr>
-            <a:r>
-              <a:rPr lang="en-US" sz="1600" b="1" i="1" u="sng" dirty="0">
+            <a:r>
+              <a:rPr lang="en-US" altLang="zh-CN" sz="1600" i="1" u="sng" dirty="0">
                 <a:solidFill>
                   <a:schemeClr val="tx1"/>
                 </a:solidFill>
@@ -4225,8 +4306,68 @@
                 <a:ea typeface="KaiTi" panose="02010609060101010101" pitchFamily="49" charset="-122"/>
                 <a:cs typeface="Times New Roman" panose="02020603050405020304" pitchFamily="18" charset="0"/>
               </a:rPr>
-              <a:t>Reducing interest rates </a:t>
-            </a:r>
+              <a:t>R</a:t>
+            </a:r>
+            <a:r>
+              <a:rPr lang="en-US" altLang="zh-CN" sz="1600" i="1" u="sng" dirty="0">
+                <a:solidFill>
+                  <a:schemeClr val="tx1"/>
+                </a:solidFill>
+                <a:effectLst/>
+                <a:latin typeface="Times New Roman" panose="02020603050405020304" pitchFamily="18" charset="0"/>
+                <a:ea typeface="KaiTi" panose="02010609060101010101" pitchFamily="49" charset="-122"/>
+                <a:cs typeface="Times New Roman" panose="02020603050405020304" pitchFamily="18" charset="0"/>
+              </a:rPr>
+              <a:t>emove </a:t>
+            </a:r>
+            <a:r>
+              <a:rPr lang="en-US" altLang="zh-CN" sz="1600" i="1" u="sng" dirty="0">
+                <a:solidFill>
+                  <a:schemeClr val="tx1"/>
+                </a:solidFill>
+                <a:latin typeface="Times New Roman" panose="02020603050405020304" pitchFamily="18" charset="0"/>
+                <a:ea typeface="KaiTi" panose="02010609060101010101" pitchFamily="49" charset="-122"/>
+                <a:cs typeface="Times New Roman" panose="02020603050405020304" pitchFamily="18" charset="0"/>
+              </a:rPr>
+              <a:t>R</a:t>
+            </a:r>
+            <a:r>
+              <a:rPr lang="en-US" altLang="zh-CN" sz="1600" i="1" u="sng" dirty="0">
+                <a:solidFill>
+                  <a:schemeClr val="tx1"/>
+                </a:solidFill>
+                <a:effectLst/>
+                <a:latin typeface="Times New Roman" panose="02020603050405020304" pitchFamily="18" charset="0"/>
+                <a:ea typeface="KaiTi" panose="02010609060101010101" pitchFamily="49" charset="-122"/>
+                <a:cs typeface="Times New Roman" panose="02020603050405020304" pitchFamily="18" charset="0"/>
+              </a:rPr>
+              <a:t>igidity in Cash</a:t>
+            </a:r>
+            <a:endParaRPr lang="en-US" sz="1600" i="1" u="sng" dirty="0">
+              <a:solidFill>
+                <a:schemeClr val="tx1"/>
+              </a:solidFill>
+              <a:effectLst/>
+              <a:latin typeface="Times New Roman" panose="02020603050405020304" pitchFamily="18" charset="0"/>
+              <a:ea typeface="KaiTi" panose="02010609060101010101" pitchFamily="49" charset="-122"/>
+              <a:cs typeface="Times New Roman" panose="02020603050405020304" pitchFamily="18" charset="0"/>
+            </a:endParaRPr>
+          </a:p>
+          <a:p>
+            <a:endParaRPr lang="en-US" sz="1600" dirty="0">
+              <a:solidFill>
+                <a:schemeClr val="tx1"/>
+              </a:solidFill>
+              <a:latin typeface="Times New Roman" panose="02020603050405020304" pitchFamily="18" charset="0"/>
+              <a:ea typeface="KaiTi" panose="02010609060101010101" pitchFamily="49" charset="-122"/>
+              <a:cs typeface="Times New Roman" panose="02020603050405020304" pitchFamily="18" charset="0"/>
+            </a:endParaRPr>
+          </a:p>
+          <a:p>
+            <a:pPr marL="285750" indent="-285750">
+              <a:buFont typeface="Wingdings" pitchFamily="2" charset="2"/>
+              <a:buChar char="Ø"/>
+            </a:pPr>
             <a:r>
               <a:rPr lang="en-US" sz="1600" dirty="0">
                 <a:solidFill>
@@ -4236,28 +4377,14 @@
                 <a:ea typeface="KaiTi" panose="02010609060101010101" pitchFamily="49" charset="-122"/>
                 <a:cs typeface="Times New Roman" panose="02020603050405020304" pitchFamily="18" charset="0"/>
               </a:rPr>
-              <a:t>on stock mortgages to near the rate for new originations, expected to average about 0.5%. </a:t>
-            </a:r>
-          </a:p>
-          <a:p>
-            <a:pPr marL="285750" indent="-285750" algn="just">
-              <a:spcAft>
-                <a:spcPts val="300"/>
-              </a:spcAft>
+              <a:t>broadly defined</a:t>
+            </a:r>
+          </a:p>
+          <a:p>
+            <a:pPr marL="285750" indent="-285750">
               <a:buFont typeface="Wingdings" pitchFamily="2" charset="2"/>
-              <a:buChar char="v"/>
+              <a:buChar char="Ø"/>
             </a:pPr>
-            <a:r>
-              <a:rPr lang="en-US" sz="1600" b="1" i="1" u="sng" dirty="0">
-                <a:solidFill>
-                  <a:schemeClr val="tx1"/>
-                </a:solidFill>
-                <a:latin typeface="Times New Roman" panose="02020603050405020304" pitchFamily="18" charset="0"/>
-                <a:ea typeface="KaiTi" panose="02010609060101010101" pitchFamily="49" charset="-122"/>
-                <a:cs typeface="Times New Roman" panose="02020603050405020304" pitchFamily="18" charset="0"/>
-              </a:rPr>
-              <a:t>Lowering</a:t>
-            </a:r>
             <a:r>
               <a:rPr lang="en-US" sz="1600" dirty="0">
                 <a:solidFill>
@@ -4267,16 +4394,13 @@
                 <a:ea typeface="KaiTi" panose="02010609060101010101" pitchFamily="49" charset="-122"/>
                 <a:cs typeface="Times New Roman" panose="02020603050405020304" pitchFamily="18" charset="0"/>
               </a:rPr>
-              <a:t> the minimum down payment ratio for second-suite loans from 25% to 15%.</a:t>
-            </a:r>
-          </a:p>
-          <a:p>
-            <a:pPr marL="285750" indent="-285750" algn="just">
-              <a:spcAft>
-                <a:spcPts val="300"/>
-              </a:spcAft>
+              <a:t>ban on in-balance sheet asset management</a:t>
+            </a:r>
+          </a:p>
+          <a:p>
+            <a:pPr marL="285750" indent="-285750">
               <a:buFont typeface="Wingdings" pitchFamily="2" charset="2"/>
-              <a:buChar char="v"/>
+              <a:buChar char="Ø"/>
             </a:pPr>
             <a:r>
               <a:rPr lang="en-US" sz="1600" dirty="0">
@@ -4287,19 +4411,14 @@
                 <a:ea typeface="KaiTi" panose="02010609060101010101" pitchFamily="49" charset="-122"/>
                 <a:cs typeface="Times New Roman" panose="02020603050405020304" pitchFamily="18" charset="0"/>
               </a:rPr>
-              <a:t>The proportion of central bank funding support in the previously created 300 billion yuan guaranteed housing refinancing will be </a:t>
-            </a:r>
-            <a:r>
-              <a:rPr lang="en-US" sz="1600" b="1" i="1" u="sng" dirty="0">
-                <a:solidFill>
-                  <a:schemeClr val="tx1"/>
-                </a:solidFill>
-                <a:latin typeface="Times New Roman" panose="02020603050405020304" pitchFamily="18" charset="0"/>
-                <a:ea typeface="KaiTi" panose="02010609060101010101" pitchFamily="49" charset="-122"/>
-                <a:cs typeface="Times New Roman" panose="02020603050405020304" pitchFamily="18" charset="0"/>
-              </a:rPr>
-              <a:t>increased from 60% to 100%</a:t>
-            </a:r>
+              <a:t>investor suitability</a:t>
+            </a:r>
+          </a:p>
+          <a:p>
+            <a:pPr marL="285750" indent="-285750">
+              <a:buFont typeface="Wingdings" pitchFamily="2" charset="2"/>
+              <a:buChar char="Ø"/>
+            </a:pPr>
             <a:r>
               <a:rPr lang="en-US" sz="1600" dirty="0">
                 <a:solidFill>
@@ -4309,28 +4428,14 @@
                 <a:ea typeface="KaiTi" panose="02010609060101010101" pitchFamily="49" charset="-122"/>
                 <a:cs typeface="Times New Roman" panose="02020603050405020304" pitchFamily="18" charset="0"/>
               </a:rPr>
-              <a:t>.</a:t>
-            </a:r>
-          </a:p>
-          <a:p>
-            <a:pPr marL="285750" indent="-285750" algn="just">
-              <a:spcAft>
-                <a:spcPts val="300"/>
-              </a:spcAft>
+              <a:t>net asset management</a:t>
+            </a:r>
+          </a:p>
+          <a:p>
+            <a:pPr marL="285750" indent="-285750">
               <a:buFont typeface="Wingdings" pitchFamily="2" charset="2"/>
-              <a:buChar char="v"/>
+              <a:buChar char="Ø"/>
             </a:pPr>
-            <a:r>
-              <a:rPr lang="en-US" sz="1600" b="1" i="1" u="sng" dirty="0">
-                <a:solidFill>
-                  <a:schemeClr val="tx1"/>
-                </a:solidFill>
-                <a:latin typeface="Times New Roman" panose="02020603050405020304" pitchFamily="18" charset="0"/>
-                <a:ea typeface="KaiTi" panose="02010609060101010101" pitchFamily="49" charset="-122"/>
-                <a:cs typeface="Times New Roman" panose="02020603050405020304" pitchFamily="18" charset="0"/>
-              </a:rPr>
-              <a:t>Extension</a:t>
-            </a:r>
             <a:r>
               <a:rPr lang="en-US" sz="1600" dirty="0">
                 <a:solidFill>
@@ -4340,10 +4445,16 @@
                 <a:ea typeface="KaiTi" panose="02010609060101010101" pitchFamily="49" charset="-122"/>
                 <a:cs typeface="Times New Roman" panose="02020603050405020304" pitchFamily="18" charset="0"/>
               </a:rPr>
-              <a:t> of phased policies on the roll-over of inventory financing for real estate enterprises and loans for operating properties until the end of 2026</a:t>
-            </a:r>
-            <a:r>
-              <a:rPr lang="en-US" altLang="zh-CN" sz="1600" dirty="0">
+              <a:t>categorized penalties</a:t>
+            </a:r>
+          </a:p>
+          <a:p>
+            <a:pPr marL="285750" indent="-285750">
+              <a:buFont typeface="Wingdings" pitchFamily="2" charset="2"/>
+              <a:buChar char="Ø"/>
+            </a:pPr>
+            <a:r>
+              <a:rPr lang="en-US" sz="1600" dirty="0">
                 <a:solidFill>
                   <a:schemeClr val="tx1"/>
                 </a:solidFill>
@@ -4351,25 +4462,17 @@
                 <a:ea typeface="KaiTi" panose="02010609060101010101" pitchFamily="49" charset="-122"/>
                 <a:cs typeface="Times New Roman" panose="02020603050405020304" pitchFamily="18" charset="0"/>
               </a:rPr>
-              <a:t>.</a:t>
-            </a:r>
-            <a:endParaRPr lang="en-US" sz="1600" dirty="0">
-              <a:solidFill>
-                <a:schemeClr val="tx1"/>
-              </a:solidFill>
-              <a:latin typeface="Times New Roman" panose="02020603050405020304" pitchFamily="18" charset="0"/>
-              <a:ea typeface="KaiTi" panose="02010609060101010101" pitchFamily="49" charset="-122"/>
-              <a:cs typeface="Times New Roman" panose="02020603050405020304" pitchFamily="18" charset="0"/>
-            </a:endParaRPr>
-          </a:p>
-        </p:txBody>
-      </p:sp>
-      <p:sp>
-        <p:nvSpPr>
-          <p:cNvPr id="17" name="Sun 16">
-            <a:extLst>
-              <a:ext uri="{FF2B5EF4-FFF2-40B4-BE49-F238E27FC236}">
-                <a16:creationId xmlns:a16="http://schemas.microsoft.com/office/drawing/2014/main" id="{2C01EC1C-B5DD-8C48-82BE-DAAD5CD1111F}"/>
+              <a:t>complaints and reports</a:t>
+            </a:r>
+          </a:p>
+        </p:txBody>
+      </p:sp>
+      <p:sp>
+        <p:nvSpPr>
+          <p:cNvPr id="37" name="Rounded Rectangle 36">
+            <a:extLst>
+              <a:ext uri="{FF2B5EF4-FFF2-40B4-BE49-F238E27FC236}">
+                <a16:creationId xmlns:a16="http://schemas.microsoft.com/office/drawing/2014/main" id="{884C4262-D21B-3048-94A1-ABD92A231703}"/>
               </a:ext>
             </a:extLst>
           </p:cNvPr>
@@ -4378,25 +4481,26 @@
         </p:nvSpPr>
         <p:spPr>
           <a:xfrm>
-            <a:off x="5580482" y="1980305"/>
-            <a:ext cx="450514" cy="450514"/>
+            <a:off x="4754645" y="3512235"/>
+            <a:ext cx="3847488" cy="1025897"/>
           </a:xfrm>
-          <a:prstGeom prst="sun">
-            <a:avLst/>
+          <a:prstGeom prst="roundRect">
+            <a:avLst>
+              <a:gd name="adj" fmla="val 3165"/>
+            </a:avLst>
           </a:prstGeom>
           <a:solidFill>
-            <a:srgbClr val="C00000"/>
+            <a:schemeClr val="accent2">
+              <a:lumMod val="40000"/>
+              <a:lumOff val="60000"/>
+            </a:schemeClr>
           </a:solidFill>
-          <a:ln>
-            <a:noFill/>
+          <a:ln w="12700">
+            <a:solidFill>
+              <a:schemeClr val="tx1"/>
+            </a:solidFill>
           </a:ln>
-          <a:effectLst>
-            <a:outerShdw blurRad="50800" dist="38100" dir="2700000" algn="tl" rotWithShape="0">
-              <a:prstClr val="black">
-                <a:alpha val="40000"/>
-              </a:prstClr>
-            </a:outerShdw>
-          </a:effectLst>
+          <a:effectLst/>
         </p:spPr>
         <p:style>
           <a:lnRef idx="2">
@@ -4418,15 +4522,526 @@
           <a:bodyPr rtlCol="0" anchor="ctr"/>
           <a:lstStyle/>
           <a:p>
-            <a:pPr algn="ctr"/>
-            <a:endParaRPr lang="en-CN"/>
+            <a:r>
+              <a:rPr lang="en-US" altLang="zh-CN" sz="1600" i="1" u="sng" dirty="0">
+                <a:solidFill>
+                  <a:schemeClr val="tx1"/>
+                </a:solidFill>
+                <a:latin typeface="Times New Roman" panose="02020603050405020304" pitchFamily="18" charset="0"/>
+                <a:ea typeface="KaiTi" panose="02010609060101010101" pitchFamily="49" charset="-122"/>
+                <a:cs typeface="Times New Roman" panose="02020603050405020304" pitchFamily="18" charset="0"/>
+              </a:rPr>
+              <a:t>R</a:t>
+            </a:r>
+            <a:r>
+              <a:rPr lang="en-US" altLang="zh-CN" sz="1600" i="1" u="sng" dirty="0">
+                <a:solidFill>
+                  <a:schemeClr val="tx1"/>
+                </a:solidFill>
+                <a:effectLst/>
+                <a:latin typeface="Times New Roman" panose="02020603050405020304" pitchFamily="18" charset="0"/>
+                <a:ea typeface="KaiTi" panose="02010609060101010101" pitchFamily="49" charset="-122"/>
+                <a:cs typeface="Times New Roman" panose="02020603050405020304" pitchFamily="18" charset="0"/>
+              </a:rPr>
+              <a:t>emove N</a:t>
+            </a:r>
+            <a:r>
+              <a:rPr lang="en-US" altLang="zh-CN" sz="1600" i="1" u="sng" dirty="0">
+                <a:solidFill>
+                  <a:schemeClr val="tx1"/>
+                </a:solidFill>
+                <a:latin typeface="Times New Roman" panose="02020603050405020304" pitchFamily="18" charset="0"/>
+                <a:ea typeface="KaiTi" panose="02010609060101010101" pitchFamily="49" charset="-122"/>
+                <a:cs typeface="Times New Roman" panose="02020603050405020304" pitchFamily="18" charset="0"/>
+              </a:rPr>
+              <a:t>esting</a:t>
+            </a:r>
+            <a:endParaRPr lang="en-US" sz="200" u="sng" dirty="0">
+              <a:solidFill>
+                <a:schemeClr val="tx1"/>
+              </a:solidFill>
+              <a:latin typeface="Times New Roman" panose="02020603050405020304" pitchFamily="18" charset="0"/>
+              <a:ea typeface="KaiTi" panose="02010609060101010101" pitchFamily="49" charset="-122"/>
+              <a:cs typeface="Times New Roman" panose="02020603050405020304" pitchFamily="18" charset="0"/>
+            </a:endParaRPr>
+          </a:p>
+          <a:p>
+            <a:endParaRPr lang="en-US" altLang="zh-CN" sz="1000" dirty="0">
+              <a:solidFill>
+                <a:schemeClr val="tx1"/>
+              </a:solidFill>
+              <a:latin typeface="Times New Roman" panose="02020603050405020304" pitchFamily="18" charset="0"/>
+              <a:ea typeface="KaiTi" panose="02010609060101010101" pitchFamily="49" charset="-122"/>
+              <a:cs typeface="Times New Roman" panose="02020603050405020304" pitchFamily="18" charset="0"/>
+            </a:endParaRPr>
+          </a:p>
+          <a:p>
+            <a:pPr marL="285750" indent="-285750">
+              <a:buFont typeface="Wingdings" pitchFamily="2" charset="2"/>
+              <a:buChar char="Ø"/>
+            </a:pPr>
+            <a:r>
+              <a:rPr lang="en-US" altLang="zh-CN" sz="1600" dirty="0">
+                <a:solidFill>
+                  <a:schemeClr val="tx1"/>
+                </a:solidFill>
+                <a:latin typeface="Times New Roman" panose="02020603050405020304" pitchFamily="18" charset="0"/>
+                <a:ea typeface="KaiTi" panose="02010609060101010101" pitchFamily="49" charset="-122"/>
+                <a:cs typeface="Times New Roman" panose="02020603050405020304" pitchFamily="18" charset="0"/>
+              </a:rPr>
+              <a:t>b</a:t>
+            </a:r>
+            <a:r>
+              <a:rPr lang="en-US" sz="1600" dirty="0">
+                <a:solidFill>
+                  <a:schemeClr val="tx1"/>
+                </a:solidFill>
+                <a:latin typeface="Times New Roman" panose="02020603050405020304" pitchFamily="18" charset="0"/>
+                <a:ea typeface="KaiTi" panose="02010609060101010101" pitchFamily="49" charset="-122"/>
+                <a:cs typeface="Times New Roman" panose="02020603050405020304" pitchFamily="18" charset="0"/>
+              </a:rPr>
+              <a:t>ack to the essence of asset management</a:t>
+            </a:r>
+          </a:p>
+          <a:p>
+            <a:pPr marL="285750" indent="-285750">
+              <a:buFont typeface="Wingdings" pitchFamily="2" charset="2"/>
+              <a:buChar char="Ø"/>
+            </a:pPr>
+            <a:r>
+              <a:rPr lang="en-US" altLang="zh-CN" sz="1600" dirty="0">
+                <a:solidFill>
+                  <a:schemeClr val="tx1"/>
+                </a:solidFill>
+                <a:latin typeface="Times New Roman" panose="02020603050405020304" pitchFamily="18" charset="0"/>
+                <a:ea typeface="KaiTi" panose="02010609060101010101" pitchFamily="49" charset="-122"/>
+                <a:cs typeface="Times New Roman" panose="02020603050405020304" pitchFamily="18" charset="0"/>
+              </a:rPr>
+              <a:t>p</a:t>
+            </a:r>
+            <a:r>
+              <a:rPr lang="en-US" sz="1600" dirty="0">
+                <a:solidFill>
+                  <a:schemeClr val="tx1"/>
+                </a:solidFill>
+                <a:latin typeface="Times New Roman" panose="02020603050405020304" pitchFamily="18" charset="0"/>
+                <a:ea typeface="KaiTi" panose="02010609060101010101" pitchFamily="49" charset="-122"/>
+                <a:cs typeface="Times New Roman" panose="02020603050405020304" pitchFamily="18" charset="0"/>
+              </a:rPr>
+              <a:t>rohibition of multi-layer nesting</a:t>
+            </a:r>
+          </a:p>
+        </p:txBody>
+      </p:sp>
+      <p:sp>
+        <p:nvSpPr>
+          <p:cNvPr id="38" name="Rounded Rectangle 37">
+            <a:extLst>
+              <a:ext uri="{FF2B5EF4-FFF2-40B4-BE49-F238E27FC236}">
+                <a16:creationId xmlns:a16="http://schemas.microsoft.com/office/drawing/2014/main" id="{20146E4A-CDF5-9B40-BAE4-B2F0CC439967}"/>
+              </a:ext>
+            </a:extLst>
+          </p:cNvPr>
+          <p:cNvSpPr/>
+          <p:nvPr/>
+        </p:nvSpPr>
+        <p:spPr>
+          <a:xfrm>
+            <a:off x="4754645" y="4601459"/>
+            <a:ext cx="3847488" cy="1454426"/>
+          </a:xfrm>
+          <a:prstGeom prst="roundRect">
+            <a:avLst>
+              <a:gd name="adj" fmla="val 3165"/>
+            </a:avLst>
+          </a:prstGeom>
+          <a:solidFill>
+            <a:schemeClr val="accent2">
+              <a:lumMod val="40000"/>
+              <a:lumOff val="60000"/>
+            </a:schemeClr>
+          </a:solidFill>
+          <a:ln w="12700">
+            <a:solidFill>
+              <a:schemeClr val="tx1"/>
+            </a:solidFill>
+          </a:ln>
+          <a:effectLst/>
+        </p:spPr>
+        <p:style>
+          <a:lnRef idx="2">
+            <a:schemeClr val="accent1">
+              <a:shade val="50000"/>
+            </a:schemeClr>
+          </a:lnRef>
+          <a:fillRef idx="1">
+            <a:schemeClr val="accent1"/>
+          </a:fillRef>
+          <a:effectRef idx="0">
+            <a:schemeClr val="accent1"/>
+          </a:effectRef>
+          <a:fontRef idx="minor">
+            <a:schemeClr val="lt1"/>
+          </a:fontRef>
+        </p:style>
+        <p:txBody>
+          <a:bodyPr rtlCol="0" anchor="ctr"/>
+          <a:lstStyle/>
+          <a:p>
+            <a:r>
+              <a:rPr lang="en-US" altLang="zh-CN" sz="1600" i="1" u="sng" dirty="0">
+                <a:solidFill>
+                  <a:schemeClr val="tx1"/>
+                </a:solidFill>
+                <a:latin typeface="Times New Roman" panose="02020603050405020304" pitchFamily="18" charset="0"/>
+                <a:ea typeface="KaiTi" panose="02010609060101010101" pitchFamily="49" charset="-122"/>
+                <a:cs typeface="Times New Roman" panose="02020603050405020304" pitchFamily="18" charset="0"/>
+              </a:rPr>
+              <a:t>Deleveraging</a:t>
+            </a:r>
+            <a:endParaRPr lang="en-US" sz="200" u="sng" dirty="0">
+              <a:solidFill>
+                <a:schemeClr val="tx1"/>
+              </a:solidFill>
+              <a:latin typeface="Times New Roman" panose="02020603050405020304" pitchFamily="18" charset="0"/>
+              <a:ea typeface="KaiTi" panose="02010609060101010101" pitchFamily="49" charset="-122"/>
+              <a:cs typeface="Times New Roman" panose="02020603050405020304" pitchFamily="18" charset="0"/>
+            </a:endParaRPr>
+          </a:p>
+          <a:p>
+            <a:endParaRPr lang="en-US" altLang="zh-CN" sz="1000" dirty="0">
+              <a:solidFill>
+                <a:schemeClr val="tx1"/>
+              </a:solidFill>
+              <a:latin typeface="Times New Roman" panose="02020603050405020304" pitchFamily="18" charset="0"/>
+              <a:ea typeface="KaiTi" panose="02010609060101010101" pitchFamily="49" charset="-122"/>
+              <a:cs typeface="Times New Roman" panose="02020603050405020304" pitchFamily="18" charset="0"/>
+            </a:endParaRPr>
+          </a:p>
+          <a:p>
+            <a:pPr marL="285750" indent="-285750">
+              <a:buFont typeface="Wingdings" pitchFamily="2" charset="2"/>
+              <a:buChar char="Ø"/>
+            </a:pPr>
+            <a:r>
+              <a:rPr lang="en-US" altLang="zh-CN" sz="1600" dirty="0">
+                <a:solidFill>
+                  <a:schemeClr val="tx1"/>
+                </a:solidFill>
+                <a:latin typeface="Times New Roman" panose="02020603050405020304" pitchFamily="18" charset="0"/>
+                <a:ea typeface="KaiTi" panose="02010609060101010101" pitchFamily="49" charset="-122"/>
+                <a:cs typeface="Times New Roman" panose="02020603050405020304" pitchFamily="18" charset="0"/>
+              </a:rPr>
+              <a:t>d</a:t>
+            </a:r>
+            <a:r>
+              <a:rPr lang="en-US" sz="1600" dirty="0">
+                <a:solidFill>
+                  <a:schemeClr val="tx1"/>
+                </a:solidFill>
+                <a:latin typeface="Times New Roman" panose="02020603050405020304" pitchFamily="18" charset="0"/>
+                <a:ea typeface="KaiTi" panose="02010609060101010101" pitchFamily="49" charset="-122"/>
+                <a:cs typeface="Times New Roman" panose="02020603050405020304" pitchFamily="18" charset="0"/>
+              </a:rPr>
+              <a:t>ebt leverage</a:t>
+            </a:r>
+          </a:p>
+          <a:p>
+            <a:pPr marL="285750" indent="-285750">
+              <a:buFont typeface="Wingdings" pitchFamily="2" charset="2"/>
+              <a:buChar char="Ø"/>
+            </a:pPr>
+            <a:r>
+              <a:rPr lang="en-US" sz="1600" dirty="0">
+                <a:solidFill>
+                  <a:schemeClr val="tx1"/>
+                </a:solidFill>
+                <a:latin typeface="Times New Roman" panose="02020603050405020304" pitchFamily="18" charset="0"/>
+                <a:ea typeface="KaiTi" panose="02010609060101010101" pitchFamily="49" charset="-122"/>
+                <a:cs typeface="Times New Roman" panose="02020603050405020304" pitchFamily="18" charset="0"/>
+              </a:rPr>
+              <a:t>graded leverage</a:t>
+            </a:r>
+          </a:p>
+          <a:p>
+            <a:pPr marL="285750" indent="-285750">
+              <a:buFont typeface="Wingdings" pitchFamily="2" charset="2"/>
+              <a:buChar char="Ø"/>
+            </a:pPr>
+            <a:r>
+              <a:rPr lang="en-US" sz="1600" dirty="0">
+                <a:solidFill>
+                  <a:schemeClr val="tx1"/>
+                </a:solidFill>
+                <a:latin typeface="Times New Roman" panose="02020603050405020304" pitchFamily="18" charset="0"/>
+                <a:ea typeface="KaiTi" panose="02010609060101010101" pitchFamily="49" charset="-122"/>
+                <a:cs typeface="Times New Roman" panose="02020603050405020304" pitchFamily="18" charset="0"/>
+              </a:rPr>
+              <a:t>prohibition of pledge financing</a:t>
+            </a:r>
+          </a:p>
+        </p:txBody>
+      </p:sp>
+      <p:sp>
+        <p:nvSpPr>
+          <p:cNvPr id="39" name="Rounded Rectangle 38">
+            <a:extLst>
+              <a:ext uri="{FF2B5EF4-FFF2-40B4-BE49-F238E27FC236}">
+                <a16:creationId xmlns:a16="http://schemas.microsoft.com/office/drawing/2014/main" id="{621EB609-352B-BC44-AB2D-A74157CF9BE9}"/>
+              </a:ext>
+            </a:extLst>
+          </p:cNvPr>
+          <p:cNvSpPr/>
+          <p:nvPr/>
+        </p:nvSpPr>
+        <p:spPr>
+          <a:xfrm>
+            <a:off x="8683178" y="3512236"/>
+            <a:ext cx="2914461" cy="1175028"/>
+          </a:xfrm>
+          <a:prstGeom prst="roundRect">
+            <a:avLst>
+              <a:gd name="adj" fmla="val 3165"/>
+            </a:avLst>
+          </a:prstGeom>
+          <a:solidFill>
+            <a:schemeClr val="accent2">
+              <a:lumMod val="40000"/>
+              <a:lumOff val="60000"/>
+            </a:schemeClr>
+          </a:solidFill>
+          <a:ln w="12700">
+            <a:solidFill>
+              <a:schemeClr val="tx1"/>
+            </a:solidFill>
+          </a:ln>
+          <a:effectLst/>
+        </p:spPr>
+        <p:style>
+          <a:lnRef idx="2">
+            <a:schemeClr val="accent1">
+              <a:shade val="50000"/>
+            </a:schemeClr>
+          </a:lnRef>
+          <a:fillRef idx="1">
+            <a:schemeClr val="accent1"/>
+          </a:fillRef>
+          <a:effectRef idx="0">
+            <a:schemeClr val="accent1"/>
+          </a:effectRef>
+          <a:fontRef idx="minor">
+            <a:schemeClr val="lt1"/>
+          </a:fontRef>
+        </p:style>
+        <p:txBody>
+          <a:bodyPr rtlCol="0" anchor="ctr"/>
+          <a:lstStyle/>
+          <a:p>
+            <a:r>
+              <a:rPr lang="en-US" altLang="zh-CN" sz="1600" i="1" u="sng" dirty="0">
+                <a:solidFill>
+                  <a:schemeClr val="tx1"/>
+                </a:solidFill>
+                <a:latin typeface="Times New Roman" panose="02020603050405020304" pitchFamily="18" charset="0"/>
+                <a:ea typeface="KaiTi" panose="02010609060101010101" pitchFamily="49" charset="-122"/>
+                <a:cs typeface="Times New Roman" panose="02020603050405020304" pitchFamily="18" charset="0"/>
+              </a:rPr>
+              <a:t>Licensing Management</a:t>
+            </a:r>
+            <a:endParaRPr lang="en-US" sz="200" u="sng" dirty="0">
+              <a:solidFill>
+                <a:schemeClr val="tx1"/>
+              </a:solidFill>
+              <a:latin typeface="Times New Roman" panose="02020603050405020304" pitchFamily="18" charset="0"/>
+              <a:ea typeface="KaiTi" panose="02010609060101010101" pitchFamily="49" charset="-122"/>
+              <a:cs typeface="Times New Roman" panose="02020603050405020304" pitchFamily="18" charset="0"/>
+            </a:endParaRPr>
+          </a:p>
+          <a:p>
+            <a:pPr marL="285750" indent="-285750">
+              <a:buFont typeface="Wingdings" pitchFamily="2" charset="2"/>
+              <a:buChar char="Ø"/>
+            </a:pPr>
+            <a:r>
+              <a:rPr lang="en-US" sz="1600" dirty="0">
+                <a:solidFill>
+                  <a:schemeClr val="tx1"/>
+                </a:solidFill>
+                <a:latin typeface="Times New Roman" panose="02020603050405020304" pitchFamily="18" charset="0"/>
+                <a:ea typeface="KaiTi" panose="02010609060101010101" pitchFamily="49" charset="-122"/>
+                <a:cs typeface="Times New Roman" panose="02020603050405020304" pitchFamily="18" charset="0"/>
+              </a:rPr>
+              <a:t>franchising</a:t>
+            </a:r>
+          </a:p>
+          <a:p>
+            <a:pPr marL="285750" indent="-285750">
+              <a:buFont typeface="Wingdings" pitchFamily="2" charset="2"/>
+              <a:buChar char="Ø"/>
+            </a:pPr>
+            <a:r>
+              <a:rPr lang="en-US" sz="1600" dirty="0">
+                <a:solidFill>
+                  <a:schemeClr val="tx1"/>
+                </a:solidFill>
+                <a:latin typeface="Times New Roman" panose="02020603050405020304" pitchFamily="18" charset="0"/>
+                <a:ea typeface="KaiTi" panose="02010609060101010101" pitchFamily="49" charset="-122"/>
+                <a:cs typeface="Times New Roman" panose="02020603050405020304" pitchFamily="18" charset="0"/>
+              </a:rPr>
+              <a:t>intelligent investment</a:t>
+            </a:r>
+          </a:p>
+          <a:p>
+            <a:pPr marL="285750" indent="-285750">
+              <a:buFont typeface="Wingdings" pitchFamily="2" charset="2"/>
+              <a:buChar char="Ø"/>
+            </a:pPr>
+            <a:r>
+              <a:rPr lang="en-US" sz="1600" dirty="0">
+                <a:solidFill>
+                  <a:schemeClr val="tx1"/>
+                </a:solidFill>
+                <a:latin typeface="Times New Roman" panose="02020603050405020304" pitchFamily="18" charset="0"/>
+                <a:ea typeface="KaiTi" panose="02010609060101010101" pitchFamily="49" charset="-122"/>
+                <a:cs typeface="Times New Roman" panose="02020603050405020304" pitchFamily="18" charset="0"/>
+              </a:rPr>
+              <a:t>distributor qualifications</a:t>
+            </a:r>
+          </a:p>
+        </p:txBody>
+      </p:sp>
+      <p:sp>
+        <p:nvSpPr>
+          <p:cNvPr id="40" name="Rounded Rectangle 39">
+            <a:extLst>
+              <a:ext uri="{FF2B5EF4-FFF2-40B4-BE49-F238E27FC236}">
+                <a16:creationId xmlns:a16="http://schemas.microsoft.com/office/drawing/2014/main" id="{1F1EFC77-152E-2047-B2DD-26ED955FDAF8}"/>
+              </a:ext>
+            </a:extLst>
+          </p:cNvPr>
+          <p:cNvSpPr/>
+          <p:nvPr/>
+        </p:nvSpPr>
+        <p:spPr>
+          <a:xfrm>
+            <a:off x="8683177" y="4722076"/>
+            <a:ext cx="2914461" cy="1330853"/>
+          </a:xfrm>
+          <a:prstGeom prst="roundRect">
+            <a:avLst>
+              <a:gd name="adj" fmla="val 3165"/>
+            </a:avLst>
+          </a:prstGeom>
+          <a:solidFill>
+            <a:schemeClr val="accent2">
+              <a:lumMod val="40000"/>
+              <a:lumOff val="60000"/>
+            </a:schemeClr>
+          </a:solidFill>
+          <a:ln w="12700">
+            <a:solidFill>
+              <a:schemeClr val="tx1"/>
+            </a:solidFill>
+          </a:ln>
+          <a:effectLst/>
+        </p:spPr>
+        <p:style>
+          <a:lnRef idx="2">
+            <a:schemeClr val="accent1">
+              <a:shade val="50000"/>
+            </a:schemeClr>
+          </a:lnRef>
+          <a:fillRef idx="1">
+            <a:schemeClr val="accent1"/>
+          </a:fillRef>
+          <a:effectRef idx="0">
+            <a:schemeClr val="accent1"/>
+          </a:effectRef>
+          <a:fontRef idx="minor">
+            <a:schemeClr val="lt1"/>
+          </a:fontRef>
+        </p:style>
+        <p:txBody>
+          <a:bodyPr rtlCol="0" anchor="ctr"/>
+          <a:lstStyle/>
+          <a:p>
+            <a:r>
+              <a:rPr lang="en-US" altLang="zh-CN" sz="1600" i="1" u="sng" dirty="0">
+                <a:solidFill>
+                  <a:schemeClr val="tx1"/>
+                </a:solidFill>
+                <a:latin typeface="Times New Roman" panose="02020603050405020304" pitchFamily="18" charset="0"/>
+                <a:ea typeface="KaiTi" panose="02010609060101010101" pitchFamily="49" charset="-122"/>
+                <a:cs typeface="Times New Roman" panose="02020603050405020304" pitchFamily="18" charset="0"/>
+              </a:rPr>
+              <a:t>De-pooling </a:t>
+            </a:r>
+            <a:endParaRPr lang="en-US" sz="1600" u="sng" dirty="0">
+              <a:solidFill>
+                <a:schemeClr val="tx1"/>
+              </a:solidFill>
+              <a:latin typeface="Times New Roman" panose="02020603050405020304" pitchFamily="18" charset="0"/>
+              <a:ea typeface="KaiTi" panose="02010609060101010101" pitchFamily="49" charset="-122"/>
+              <a:cs typeface="Times New Roman" panose="02020603050405020304" pitchFamily="18" charset="0"/>
+            </a:endParaRPr>
+          </a:p>
+          <a:p>
+            <a:pPr marL="285750" indent="-285750">
+              <a:buFont typeface="Wingdings" pitchFamily="2" charset="2"/>
+              <a:buChar char="Ø"/>
+            </a:pPr>
+            <a:r>
+              <a:rPr lang="en-US" sz="1600" dirty="0">
+                <a:solidFill>
+                  <a:schemeClr val="tx1"/>
+                </a:solidFill>
+                <a:latin typeface="Times New Roman" panose="02020603050405020304" pitchFamily="18" charset="0"/>
+                <a:ea typeface="KaiTi" panose="02010609060101010101" pitchFamily="49" charset="-122"/>
+                <a:cs typeface="Times New Roman" panose="02020603050405020304" pitchFamily="18" charset="0"/>
+              </a:rPr>
+              <a:t>three-order requirement</a:t>
+            </a:r>
+          </a:p>
+          <a:p>
+            <a:pPr marL="285750" indent="-285750">
+              <a:buFont typeface="Wingdings" pitchFamily="2" charset="2"/>
+              <a:buChar char="Ø"/>
+            </a:pPr>
+            <a:r>
+              <a:rPr lang="en-US" sz="1600" dirty="0">
+                <a:solidFill>
+                  <a:schemeClr val="tx1"/>
+                </a:solidFill>
+                <a:latin typeface="Times New Roman" panose="02020603050405020304" pitchFamily="18" charset="0"/>
+                <a:ea typeface="KaiTi" panose="02010609060101010101" pitchFamily="49" charset="-122"/>
+                <a:cs typeface="Times New Roman" panose="02020603050405020304" pitchFamily="18" charset="0"/>
+              </a:rPr>
+              <a:t>duration management</a:t>
+            </a:r>
+          </a:p>
+          <a:p>
+            <a:pPr marL="285750" indent="-285750">
+              <a:buFont typeface="Wingdings" pitchFamily="2" charset="2"/>
+              <a:buChar char="Ø"/>
+            </a:pPr>
+            <a:r>
+              <a:rPr lang="en-US" sz="1600" dirty="0">
+                <a:solidFill>
+                  <a:schemeClr val="tx1"/>
+                </a:solidFill>
+                <a:latin typeface="Times New Roman" panose="02020603050405020304" pitchFamily="18" charset="0"/>
+                <a:ea typeface="KaiTi" panose="02010609060101010101" pitchFamily="49" charset="-122"/>
+                <a:cs typeface="Times New Roman" panose="02020603050405020304" pitchFamily="18" charset="0"/>
+              </a:rPr>
+              <a:t>prohibition of limits and mismatches</a:t>
+            </a:r>
           </a:p>
         </p:txBody>
       </p:sp>
     </p:spTree>
     <p:extLst>
       <p:ext uri="{BB962C8B-B14F-4D97-AF65-F5344CB8AC3E}">
-        <p14:creationId xmlns:p14="http://schemas.microsoft.com/office/powerpoint/2010/main" val="3465192682"/>
+        <p14:creationId xmlns:p14="http://schemas.microsoft.com/office/powerpoint/2010/main" val="2896180752"/>
       </p:ext>
     </p:extLst>
   </p:cSld>
@@ -4453,329 +5068,12 @@
           <a:chExt cx="0" cy="0"/>
         </a:xfrm>
       </p:grpSpPr>
-      <p:sp>
-        <p:nvSpPr>
-          <p:cNvPr id="5" name="Rectangle 4">
-            <a:extLst>
-              <a:ext uri="{FF2B5EF4-FFF2-40B4-BE49-F238E27FC236}">
-                <a16:creationId xmlns:a16="http://schemas.microsoft.com/office/drawing/2014/main" id="{56239B50-8E64-4A42-A81C-147CDEA846C1}"/>
-              </a:ext>
-            </a:extLst>
-          </p:cNvPr>
-          <p:cNvSpPr/>
-          <p:nvPr/>
-        </p:nvSpPr>
-        <p:spPr>
-          <a:xfrm>
-            <a:off x="266218" y="2369241"/>
-            <a:ext cx="2550289" cy="646495"/>
-          </a:xfrm>
-          <a:prstGeom prst="rect">
-            <a:avLst/>
-          </a:prstGeom>
-          <a:solidFill>
-            <a:schemeClr val="accent6">
-              <a:lumMod val="20000"/>
-              <a:lumOff val="80000"/>
-            </a:schemeClr>
-          </a:solidFill>
-          <a:ln w="19050">
-            <a:solidFill>
-              <a:schemeClr val="tx1"/>
-            </a:solidFill>
-            <a:prstDash val="dash"/>
-          </a:ln>
-          <a:effectLst>
-            <a:outerShdw blurRad="50800" dist="38100" dir="2700000" algn="tl" rotWithShape="0">
-              <a:prstClr val="black">
-                <a:alpha val="40000"/>
-              </a:prstClr>
-            </a:outerShdw>
-          </a:effectLst>
-        </p:spPr>
-        <p:style>
-          <a:lnRef idx="2">
-            <a:schemeClr val="accent1">
-              <a:shade val="50000"/>
-            </a:schemeClr>
-          </a:lnRef>
-          <a:fillRef idx="1">
-            <a:schemeClr val="accent1"/>
-          </a:fillRef>
-          <a:effectRef idx="0">
-            <a:schemeClr val="accent1"/>
-          </a:effectRef>
-          <a:fontRef idx="minor">
-            <a:schemeClr val="lt1"/>
-          </a:fontRef>
-        </p:style>
-        <p:txBody>
-          <a:bodyPr rtlCol="0" anchor="ctr"/>
-          <a:lstStyle/>
-          <a:p>
-            <a:pPr algn="ctr"/>
-            <a:r>
-              <a:rPr lang="en-CN" b="1" dirty="0">
-                <a:solidFill>
-                  <a:schemeClr val="tx1"/>
-                </a:solidFill>
-                <a:latin typeface="Times New Roman" panose="02020603050405020304" pitchFamily="18" charset="0"/>
-                <a:cs typeface="Times New Roman" panose="02020603050405020304" pitchFamily="18" charset="0"/>
-              </a:rPr>
-              <a:t>PBOC</a:t>
-            </a:r>
-          </a:p>
-        </p:txBody>
-      </p:sp>
-      <p:sp>
-        <p:nvSpPr>
-          <p:cNvPr id="6" name="Rectangle 5">
-            <a:extLst>
-              <a:ext uri="{FF2B5EF4-FFF2-40B4-BE49-F238E27FC236}">
-                <a16:creationId xmlns:a16="http://schemas.microsoft.com/office/drawing/2014/main" id="{DE7DD7D9-714D-7E46-8E93-175F36825184}"/>
-              </a:ext>
-            </a:extLst>
-          </p:cNvPr>
-          <p:cNvSpPr/>
-          <p:nvPr/>
-        </p:nvSpPr>
-        <p:spPr>
-          <a:xfrm>
-            <a:off x="4820854" y="2369241"/>
-            <a:ext cx="2550289" cy="646495"/>
-          </a:xfrm>
-          <a:prstGeom prst="rect">
-            <a:avLst/>
-          </a:prstGeom>
-          <a:solidFill>
-            <a:schemeClr val="accent6">
-              <a:lumMod val="20000"/>
-              <a:lumOff val="80000"/>
-            </a:schemeClr>
-          </a:solidFill>
-          <a:ln w="19050">
-            <a:solidFill>
-              <a:schemeClr val="tx1"/>
-            </a:solidFill>
-            <a:prstDash val="dash"/>
-          </a:ln>
-          <a:effectLst>
-            <a:outerShdw blurRad="50800" dist="38100" dir="2700000" algn="tl" rotWithShape="0">
-              <a:prstClr val="black">
-                <a:alpha val="40000"/>
-              </a:prstClr>
-            </a:outerShdw>
-          </a:effectLst>
-        </p:spPr>
-        <p:style>
-          <a:lnRef idx="2">
-            <a:schemeClr val="accent1">
-              <a:shade val="50000"/>
-            </a:schemeClr>
-          </a:lnRef>
-          <a:fillRef idx="1">
-            <a:schemeClr val="accent1"/>
-          </a:fillRef>
-          <a:effectRef idx="0">
-            <a:schemeClr val="accent1"/>
-          </a:effectRef>
-          <a:fontRef idx="minor">
-            <a:schemeClr val="lt1"/>
-          </a:fontRef>
-        </p:style>
-        <p:txBody>
-          <a:bodyPr rtlCol="0" anchor="ctr"/>
-          <a:lstStyle/>
-          <a:p>
-            <a:pPr algn="ctr"/>
-            <a:r>
-              <a:rPr lang="en-US" sz="1800" b="1" dirty="0">
-                <a:solidFill>
-                  <a:srgbClr val="000000"/>
-                </a:solidFill>
-                <a:effectLst/>
-                <a:latin typeface="Times New Roman" panose="02020603050405020304" pitchFamily="18" charset="0"/>
-                <a:ea typeface="KaiTi" panose="02010609060101010101" pitchFamily="49" charset="-122"/>
-              </a:rPr>
-              <a:t>Securities, Funds and Insurance Companies</a:t>
-            </a:r>
-            <a:r>
-              <a:rPr lang="en-CN" b="1" dirty="0">
-                <a:effectLst/>
-              </a:rPr>
-              <a:t> </a:t>
-            </a:r>
-            <a:endParaRPr lang="en-CN" b="1" dirty="0">
-              <a:solidFill>
-                <a:schemeClr val="tx1"/>
-              </a:solidFill>
-              <a:latin typeface="Times New Roman" panose="02020603050405020304" pitchFamily="18" charset="0"/>
-              <a:cs typeface="Times New Roman" panose="02020603050405020304" pitchFamily="18" charset="0"/>
-            </a:endParaRPr>
-          </a:p>
-        </p:txBody>
-      </p:sp>
-      <p:sp>
-        <p:nvSpPr>
-          <p:cNvPr id="7" name="Rectangle 6">
-            <a:extLst>
-              <a:ext uri="{FF2B5EF4-FFF2-40B4-BE49-F238E27FC236}">
-                <a16:creationId xmlns:a16="http://schemas.microsoft.com/office/drawing/2014/main" id="{77F556E3-E4A0-2148-8113-600CB583AA59}"/>
-              </a:ext>
-            </a:extLst>
-          </p:cNvPr>
-          <p:cNvSpPr/>
-          <p:nvPr/>
-        </p:nvSpPr>
-        <p:spPr>
-          <a:xfrm>
-            <a:off x="9375490" y="2369240"/>
-            <a:ext cx="2550289" cy="646495"/>
-          </a:xfrm>
-          <a:prstGeom prst="rect">
-            <a:avLst/>
-          </a:prstGeom>
-          <a:solidFill>
-            <a:schemeClr val="accent6">
-              <a:lumMod val="20000"/>
-              <a:lumOff val="80000"/>
-            </a:schemeClr>
-          </a:solidFill>
-          <a:ln w="19050">
-            <a:solidFill>
-              <a:schemeClr val="tx1"/>
-            </a:solidFill>
-            <a:prstDash val="dash"/>
-          </a:ln>
-          <a:effectLst>
-            <a:outerShdw blurRad="50800" dist="38100" dir="2700000" algn="tl" rotWithShape="0">
-              <a:prstClr val="black">
-                <a:alpha val="40000"/>
-              </a:prstClr>
-            </a:outerShdw>
-          </a:effectLst>
-        </p:spPr>
-        <p:style>
-          <a:lnRef idx="2">
-            <a:schemeClr val="accent1">
-              <a:shade val="50000"/>
-            </a:schemeClr>
-          </a:lnRef>
-          <a:fillRef idx="1">
-            <a:schemeClr val="accent1"/>
-          </a:fillRef>
-          <a:effectRef idx="0">
-            <a:schemeClr val="accent1"/>
-          </a:effectRef>
-          <a:fontRef idx="minor">
-            <a:schemeClr val="lt1"/>
-          </a:fontRef>
-        </p:style>
-        <p:txBody>
-          <a:bodyPr rtlCol="0" anchor="ctr"/>
-          <a:lstStyle/>
-          <a:p>
-            <a:pPr algn="ctr"/>
-            <a:r>
-              <a:rPr lang="en-US" b="1" dirty="0">
-                <a:solidFill>
-                  <a:schemeClr val="tx1"/>
-                </a:solidFill>
-                <a:latin typeface="Times New Roman" panose="02020603050405020304" pitchFamily="18" charset="0"/>
-                <a:cs typeface="Times New Roman" panose="02020603050405020304" pitchFamily="18" charset="0"/>
-              </a:rPr>
-              <a:t>Secondary Market</a:t>
-            </a:r>
-            <a:endParaRPr lang="en-CN" b="1" dirty="0">
-              <a:solidFill>
-                <a:schemeClr val="tx1"/>
-              </a:solidFill>
-              <a:latin typeface="Times New Roman" panose="02020603050405020304" pitchFamily="18" charset="0"/>
-              <a:cs typeface="Times New Roman" panose="02020603050405020304" pitchFamily="18" charset="0"/>
-            </a:endParaRPr>
-          </a:p>
-        </p:txBody>
-      </p:sp>
-      <p:sp>
-        <p:nvSpPr>
-          <p:cNvPr id="8" name="Rectangle 7">
-            <a:extLst>
-              <a:ext uri="{FF2B5EF4-FFF2-40B4-BE49-F238E27FC236}">
-                <a16:creationId xmlns:a16="http://schemas.microsoft.com/office/drawing/2014/main" id="{4BD00138-F6BD-7748-8964-B4B38EEE0839}"/>
-              </a:ext>
-            </a:extLst>
-          </p:cNvPr>
-          <p:cNvSpPr/>
-          <p:nvPr/>
-        </p:nvSpPr>
-        <p:spPr>
-          <a:xfrm>
-            <a:off x="4820854" y="4247112"/>
-            <a:ext cx="2550289" cy="646495"/>
-          </a:xfrm>
-          <a:prstGeom prst="rect">
-            <a:avLst/>
-          </a:prstGeom>
-          <a:solidFill>
-            <a:schemeClr val="accent6">
-              <a:lumMod val="20000"/>
-              <a:lumOff val="80000"/>
-            </a:schemeClr>
-          </a:solidFill>
-          <a:ln w="19050">
-            <a:solidFill>
-              <a:schemeClr val="tx1"/>
-            </a:solidFill>
-            <a:prstDash val="dash"/>
-          </a:ln>
-          <a:effectLst>
-            <a:outerShdw blurRad="50800" dist="38100" dir="2700000" algn="tl" rotWithShape="0">
-              <a:prstClr val="black">
-                <a:alpha val="40000"/>
-              </a:prstClr>
-            </a:outerShdw>
-          </a:effectLst>
-        </p:spPr>
-        <p:style>
-          <a:lnRef idx="2">
-            <a:schemeClr val="accent1">
-              <a:shade val="50000"/>
-            </a:schemeClr>
-          </a:lnRef>
-          <a:fillRef idx="1">
-            <a:schemeClr val="accent1"/>
-          </a:fillRef>
-          <a:effectRef idx="0">
-            <a:schemeClr val="accent1"/>
-          </a:effectRef>
-          <a:fontRef idx="minor">
-            <a:schemeClr val="lt1"/>
-          </a:fontRef>
-        </p:style>
-        <p:txBody>
-          <a:bodyPr rtlCol="0" anchor="ctr"/>
-          <a:lstStyle/>
-          <a:p>
-            <a:pPr algn="ctr"/>
-            <a:r>
-              <a:rPr lang="en-CN" b="1" dirty="0">
-                <a:solidFill>
-                  <a:schemeClr val="tx1"/>
-                </a:solidFill>
-                <a:latin typeface="Times New Roman" panose="02020603050405020304" pitchFamily="18" charset="0"/>
-                <a:cs typeface="Times New Roman" panose="02020603050405020304" pitchFamily="18" charset="0"/>
-              </a:rPr>
-              <a:t>Stock Market</a:t>
-            </a:r>
-          </a:p>
-        </p:txBody>
-      </p:sp>
       <p:grpSp>
         <p:nvGrpSpPr>
-          <p:cNvPr id="12" name="Group 11">
-            <a:extLst>
-              <a:ext uri="{FF2B5EF4-FFF2-40B4-BE49-F238E27FC236}">
-                <a16:creationId xmlns:a16="http://schemas.microsoft.com/office/drawing/2014/main" id="{B9C4FD50-A12F-3D44-B63F-69BB9299723E}"/>
+          <p:cNvPr id="7" name="Group 6">
+            <a:extLst>
+              <a:ext uri="{FF2B5EF4-FFF2-40B4-BE49-F238E27FC236}">
+                <a16:creationId xmlns:a16="http://schemas.microsoft.com/office/drawing/2014/main" id="{638D65C8-1685-2F47-8BC5-20F60F6A9C08}"/>
               </a:ext>
             </a:extLst>
           </p:cNvPr>
@@ -4784,994 +5082,690 @@
         </p:nvGrpSpPr>
         <p:grpSpPr>
           <a:xfrm>
-            <a:off x="2816506" y="2550113"/>
-            <a:ext cx="2004348" cy="284748"/>
-            <a:chOff x="2816506" y="3398002"/>
-            <a:chExt cx="2004348" cy="284748"/>
+            <a:off x="1558341" y="2190741"/>
+            <a:ext cx="9075319" cy="2535439"/>
+            <a:chOff x="1558341" y="2190741"/>
+            <a:chExt cx="9075319" cy="2535439"/>
           </a:xfrm>
         </p:grpSpPr>
-        <p:cxnSp>
-          <p:nvCxnSpPr>
-            <p:cNvPr id="10" name="Straight Arrow Connector 9">
+        <p:pic>
+          <p:nvPicPr>
+            <p:cNvPr id="5" name="Picture 4">
               <a:extLst>
                 <a:ext uri="{FF2B5EF4-FFF2-40B4-BE49-F238E27FC236}">
-                  <a16:creationId xmlns:a16="http://schemas.microsoft.com/office/drawing/2014/main" id="{F22876C3-B594-F044-AD59-0013DCEE5E93}"/>
+                  <a16:creationId xmlns:a16="http://schemas.microsoft.com/office/drawing/2014/main" id="{C75E77C7-B47B-D245-AB00-740348771797}"/>
                 </a:ext>
               </a:extLst>
             </p:cNvPr>
-            <p:cNvCxnSpPr>
-              <a:cxnSpLocks/>
-            </p:cNvCxnSpPr>
+            <p:cNvPicPr>
+              <a:picLocks noChangeAspect="1"/>
+            </p:cNvPicPr>
             <p:nvPr/>
-          </p:nvCxnSpPr>
+          </p:nvPicPr>
+          <p:blipFill>
+            <a:blip r:embed="rId2"/>
+            <a:stretch>
+              <a:fillRect/>
+            </a:stretch>
+          </p:blipFill>
           <p:spPr>
             <a:xfrm>
-              <a:off x="2816507" y="3398002"/>
-              <a:ext cx="2004347" cy="0"/>
+              <a:off x="1558341" y="2205471"/>
+              <a:ext cx="4537659" cy="2505977"/>
             </a:xfrm>
-            <a:prstGeom prst="straightConnector1">
+            <a:prstGeom prst="rect">
               <a:avLst/>
             </a:prstGeom>
-            <a:ln w="15875">
+          </p:spPr>
+        </p:pic>
+        <p:pic>
+          <p:nvPicPr>
+            <p:cNvPr id="6" name="Picture 5">
+              <a:extLst>
+                <a:ext uri="{FF2B5EF4-FFF2-40B4-BE49-F238E27FC236}">
+                  <a16:creationId xmlns:a16="http://schemas.microsoft.com/office/drawing/2014/main" id="{C31FB06C-A74A-8646-8B39-356459BA41D8}"/>
+                </a:ext>
+              </a:extLst>
+            </p:cNvPr>
+            <p:cNvPicPr>
+              <a:picLocks noChangeAspect="1"/>
+            </p:cNvPicPr>
+            <p:nvPr/>
+          </p:nvPicPr>
+          <p:blipFill>
+            <a:blip r:embed="rId3"/>
+            <a:stretch>
+              <a:fillRect/>
+            </a:stretch>
+          </p:blipFill>
+          <p:spPr>
+            <a:xfrm>
+              <a:off x="6096000" y="2190741"/>
+              <a:ext cx="4537660" cy="2535439"/>
+            </a:xfrm>
+            <a:prstGeom prst="rect">
+              <a:avLst/>
+            </a:prstGeom>
+          </p:spPr>
+        </p:pic>
+      </p:grpSp>
+    </p:spTree>
+    <p:extLst>
+      <p:ext uri="{BB962C8B-B14F-4D97-AF65-F5344CB8AC3E}">
+        <p14:creationId xmlns:p14="http://schemas.microsoft.com/office/powerpoint/2010/main" val="3224059984"/>
+      </p:ext>
+    </p:extLst>
+  </p:cSld>
+  <p:clrMapOvr>
+    <a:masterClrMapping/>
+  </p:clrMapOvr>
+</p:sld>
+</file>
+
+<file path=ppt/slides/slide3.xml><?xml version="1.0" encoding="utf-8"?>
+<p:sld xmlns:a="http://schemas.openxmlformats.org/drawingml/2006/main" xmlns:r="http://schemas.openxmlformats.org/officeDocument/2006/relationships" xmlns:p="http://schemas.openxmlformats.org/presentationml/2006/main">
+  <p:cSld>
+    <p:spTree>
+      <p:nvGrpSpPr>
+        <p:cNvPr id="1" name=""/>
+        <p:cNvGrpSpPr/>
+        <p:nvPr/>
+      </p:nvGrpSpPr>
+      <p:grpSpPr>
+        <a:xfrm>
+          <a:off x="0" y="0"/>
+          <a:ext cx="0" cy="0"/>
+          <a:chOff x="0" y="0"/>
+          <a:chExt cx="0" cy="0"/>
+        </a:xfrm>
+      </p:grpSpPr>
+      <p:grpSp>
+        <p:nvGrpSpPr>
+          <p:cNvPr id="23" name="Group 22">
+            <a:extLst>
+              <a:ext uri="{FF2B5EF4-FFF2-40B4-BE49-F238E27FC236}">
+                <a16:creationId xmlns:a16="http://schemas.microsoft.com/office/drawing/2014/main" id="{3D641732-EBCA-4140-8194-9F4D60B2F833}"/>
+              </a:ext>
+            </a:extLst>
+          </p:cNvPr>
+          <p:cNvGrpSpPr/>
+          <p:nvPr/>
+        </p:nvGrpSpPr>
+        <p:grpSpPr>
+          <a:xfrm>
+            <a:off x="1392065" y="1290811"/>
+            <a:ext cx="9407870" cy="4276377"/>
+            <a:chOff x="338559" y="478503"/>
+            <a:chExt cx="9407870" cy="4276377"/>
+          </a:xfrm>
+        </p:grpSpPr>
+        <p:sp>
+          <p:nvSpPr>
+            <p:cNvPr id="8" name="Rounded Rectangle 7">
+              <a:extLst>
+                <a:ext uri="{FF2B5EF4-FFF2-40B4-BE49-F238E27FC236}">
+                  <a16:creationId xmlns:a16="http://schemas.microsoft.com/office/drawing/2014/main" id="{31C10CCC-016B-FE4E-80A1-23EF56110D72}"/>
+                </a:ext>
+              </a:extLst>
+            </p:cNvPr>
+            <p:cNvSpPr/>
+            <p:nvPr/>
+          </p:nvSpPr>
+          <p:spPr>
+            <a:xfrm>
+              <a:off x="338559" y="478503"/>
+              <a:ext cx="9407869" cy="4276377"/>
+            </a:xfrm>
+            <a:prstGeom prst="roundRect">
+              <a:avLst>
+                <a:gd name="adj" fmla="val 1005"/>
+              </a:avLst>
+            </a:prstGeom>
+            <a:noFill/>
+            <a:ln w="19050">
               <a:solidFill>
-                <a:schemeClr val="accent2"/>
+                <a:schemeClr val="tx1"/>
               </a:solidFill>
-              <a:tailEnd type="stealth" w="lg" len="lg"/>
             </a:ln>
+            <a:effectLst/>
           </p:spPr>
           <p:style>
-            <a:lnRef idx="1">
-              <a:schemeClr val="accent1"/>
+            <a:lnRef idx="2">
+              <a:schemeClr val="accent1">
+                <a:shade val="50000"/>
+              </a:schemeClr>
             </a:lnRef>
-            <a:fillRef idx="0">
+            <a:fillRef idx="1">
               <a:schemeClr val="accent1"/>
             </a:fillRef>
             <a:effectRef idx="0">
               <a:schemeClr val="accent1"/>
             </a:effectRef>
             <a:fontRef idx="minor">
-              <a:schemeClr val="tx1"/>
+              <a:schemeClr val="lt1"/>
             </a:fontRef>
           </p:style>
-        </p:cxnSp>
-        <p:cxnSp>
-          <p:nvCxnSpPr>
-            <p:cNvPr id="11" name="Straight Arrow Connector 10">
+          <p:txBody>
+            <a:bodyPr rtlCol="0" anchor="t"/>
+            <a:lstStyle/>
+            <a:p>
+              <a:endParaRPr lang="en-US" dirty="0">
+                <a:solidFill>
+                  <a:srgbClr val="000000"/>
+                </a:solidFill>
+                <a:effectLst/>
+                <a:latin typeface="Times New Roman" panose="02020603050405020304" pitchFamily="18" charset="0"/>
+              </a:endParaRPr>
+            </a:p>
+          </p:txBody>
+        </p:sp>
+        <p:sp>
+          <p:nvSpPr>
+            <p:cNvPr id="9" name="TextBox 8">
               <a:extLst>
                 <a:ext uri="{FF2B5EF4-FFF2-40B4-BE49-F238E27FC236}">
-                  <a16:creationId xmlns:a16="http://schemas.microsoft.com/office/drawing/2014/main" id="{CA252B74-7F7E-0D42-B6A0-2BB0273C3B5C}"/>
+                  <a16:creationId xmlns:a16="http://schemas.microsoft.com/office/drawing/2014/main" id="{D5487FE2-4696-B34C-9307-739612B4A303}"/>
                 </a:ext>
               </a:extLst>
             </p:cNvPr>
-            <p:cNvCxnSpPr>
-              <a:cxnSpLocks/>
-            </p:cNvCxnSpPr>
+            <p:cNvSpPr txBox="1"/>
             <p:nvPr/>
-          </p:nvCxnSpPr>
+          </p:nvSpPr>
           <p:spPr>
             <a:xfrm>
-              <a:off x="2816506" y="3682750"/>
-              <a:ext cx="2004347" cy="0"/>
+              <a:off x="338561" y="478503"/>
+              <a:ext cx="9407868" cy="369332"/>
             </a:xfrm>
-            <a:prstGeom prst="straightConnector1">
+            <a:prstGeom prst="rect">
               <a:avLst/>
             </a:prstGeom>
-            <a:ln w="15875">
+            <a:noFill/>
+          </p:spPr>
+          <p:txBody>
+            <a:bodyPr wrap="square">
+              <a:spAutoFit/>
+            </a:bodyPr>
+            <a:lstStyle/>
+            <a:p>
+              <a:r>
+                <a:rPr lang="en-US" b="1" dirty="0">
+                  <a:solidFill>
+                    <a:srgbClr val="000000"/>
+                  </a:solidFill>
+                  <a:effectLst/>
+                  <a:latin typeface="Times New Roman" panose="02020603050405020304" pitchFamily="18" charset="0"/>
+                </a:rPr>
+                <a:t>The</a:t>
+              </a:r>
+              <a:r>
+                <a:rPr lang="zh-CN" altLang="en-US" b="1" dirty="0">
+                  <a:solidFill>
+                    <a:srgbClr val="000000"/>
+                  </a:solidFill>
+                  <a:effectLst/>
+                  <a:latin typeface="Times New Roman" panose="02020603050405020304" pitchFamily="18" charset="0"/>
+                </a:rPr>
+                <a:t> </a:t>
+              </a:r>
+              <a:r>
+                <a:rPr lang="en-US" altLang="zh-CN" b="1" dirty="0">
+                  <a:solidFill>
+                    <a:srgbClr val="000000"/>
+                  </a:solidFill>
+                  <a:effectLst/>
+                  <a:latin typeface="Times New Roman" panose="02020603050405020304" pitchFamily="18" charset="0"/>
+                </a:rPr>
+                <a:t>Involving Way of Commercial Banks</a:t>
+              </a:r>
+              <a:r>
+                <a:rPr lang="zh-CN" altLang="en-US" b="1" dirty="0">
+                  <a:solidFill>
+                    <a:srgbClr val="000000"/>
+                  </a:solidFill>
+                  <a:effectLst/>
+                  <a:latin typeface="Times New Roman" panose="02020603050405020304" pitchFamily="18" charset="0"/>
+                </a:rPr>
+                <a:t> </a:t>
+              </a:r>
+              <a:r>
+                <a:rPr lang="en-US" altLang="zh-CN" b="1" dirty="0">
+                  <a:solidFill>
+                    <a:srgbClr val="000000"/>
+                  </a:solidFill>
+                  <a:effectLst/>
+                  <a:latin typeface="Times New Roman" panose="02020603050405020304" pitchFamily="18" charset="0"/>
+                </a:rPr>
+                <a:t>🏦</a:t>
+              </a:r>
+              <a:endParaRPr lang="en-US" b="1" dirty="0">
+                <a:solidFill>
+                  <a:srgbClr val="000000"/>
+                </a:solidFill>
+                <a:effectLst/>
+                <a:latin typeface="Times New Roman" panose="02020603050405020304" pitchFamily="18" charset="0"/>
+              </a:endParaRPr>
+            </a:p>
+          </p:txBody>
+        </p:sp>
+        <p:sp>
+          <p:nvSpPr>
+            <p:cNvPr id="10" name="Rounded Rectangle 9">
+              <a:extLst>
+                <a:ext uri="{FF2B5EF4-FFF2-40B4-BE49-F238E27FC236}">
+                  <a16:creationId xmlns:a16="http://schemas.microsoft.com/office/drawing/2014/main" id="{115437DC-BC6B-AB4F-B496-FB1F3FF581EE}"/>
+                </a:ext>
+              </a:extLst>
+            </p:cNvPr>
+            <p:cNvSpPr/>
+            <p:nvPr/>
+          </p:nvSpPr>
+          <p:spPr>
+            <a:xfrm>
+              <a:off x="612290" y="1001358"/>
+              <a:ext cx="3389556" cy="1688054"/>
+            </a:xfrm>
+            <a:prstGeom prst="roundRect">
+              <a:avLst>
+                <a:gd name="adj" fmla="val 4620"/>
+              </a:avLst>
+            </a:prstGeom>
+            <a:solidFill>
+              <a:schemeClr val="accent3">
+                <a:lumMod val="20000"/>
+                <a:lumOff val="80000"/>
+              </a:schemeClr>
+            </a:solidFill>
+            <a:ln w="19050">
               <a:solidFill>
-                <a:schemeClr val="accent2"/>
+                <a:schemeClr val="tx1"/>
               </a:solidFill>
-              <a:headEnd type="stealth" w="lg" len="lg"/>
-              <a:tailEnd type="none" w="lg" len="lg"/>
             </a:ln>
+            <a:effectLst>
+              <a:outerShdw blurRad="50800" dist="38100" dir="2700000" algn="tl" rotWithShape="0">
+                <a:prstClr val="black">
+                  <a:alpha val="40000"/>
+                </a:prstClr>
+              </a:outerShdw>
+            </a:effectLst>
           </p:spPr>
           <p:style>
-            <a:lnRef idx="1">
-              <a:schemeClr val="accent1"/>
+            <a:lnRef idx="2">
+              <a:schemeClr val="accent1">
+                <a:shade val="50000"/>
+              </a:schemeClr>
             </a:lnRef>
-            <a:fillRef idx="0">
+            <a:fillRef idx="1">
               <a:schemeClr val="accent1"/>
             </a:fillRef>
             <a:effectRef idx="0">
               <a:schemeClr val="accent1"/>
             </a:effectRef>
             <a:fontRef idx="minor">
-              <a:schemeClr val="tx1"/>
+              <a:schemeClr val="lt1"/>
             </a:fontRef>
           </p:style>
-        </p:cxnSp>
-      </p:grpSp>
-      <p:sp>
-        <p:nvSpPr>
-          <p:cNvPr id="14" name="TextBox 13">
-            <a:extLst>
-              <a:ext uri="{FF2B5EF4-FFF2-40B4-BE49-F238E27FC236}">
-                <a16:creationId xmlns:a16="http://schemas.microsoft.com/office/drawing/2014/main" id="{505F4F6C-3628-3B46-B4EA-1B2C32EC03F8}"/>
-              </a:ext>
-            </a:extLst>
-          </p:cNvPr>
-          <p:cNvSpPr txBox="1"/>
-          <p:nvPr/>
-        </p:nvSpPr>
-        <p:spPr>
-          <a:xfrm>
-            <a:off x="2816504" y="1965526"/>
-            <a:ext cx="2004347" cy="584775"/>
-          </a:xfrm>
-          <a:prstGeom prst="rect">
-            <a:avLst/>
-          </a:prstGeom>
-          <a:noFill/>
-        </p:spPr>
-        <p:txBody>
-          <a:bodyPr wrap="square">
-            <a:spAutoFit/>
-          </a:bodyPr>
-          <a:lstStyle/>
-          <a:p>
-            <a:pPr algn="ctr"/>
-            <a:r>
-              <a:rPr lang="en-US" sz="1600" i="1" dirty="0">
+          <p:txBody>
+            <a:bodyPr rtlCol="0" anchor="ctr"/>
+            <a:lstStyle/>
+            <a:p>
+              <a:r>
+                <a:rPr lang="en-US" sz="1600" b="1" i="1" dirty="0">
+                  <a:solidFill>
+                    <a:schemeClr val="tx1"/>
+                  </a:solidFill>
+                  <a:latin typeface="Times New Roman" panose="02020603050405020304" pitchFamily="18" charset="0"/>
+                  <a:ea typeface="KaiTi" panose="02010609060101010101" pitchFamily="49" charset="-122"/>
+                  <a:cs typeface="Times New Roman" panose="02020603050405020304" pitchFamily="18" charset="0"/>
+                </a:rPr>
+                <a:t>Part 1. </a:t>
+              </a:r>
+              <a:r>
+                <a:rPr lang="en-US" sz="1600" b="1" i="1" dirty="0">
+                  <a:solidFill>
+                    <a:schemeClr val="tx1"/>
+                  </a:solidFill>
+                  <a:effectLst/>
+                  <a:latin typeface="Times New Roman" panose="02020603050405020304" pitchFamily="18" charset="0"/>
+                  <a:ea typeface="KaiTi" panose="02010609060101010101" pitchFamily="49" charset="-122"/>
+                  <a:cs typeface="Times New Roman" panose="02020603050405020304" pitchFamily="18" charset="0"/>
+                </a:rPr>
+                <a:t>Transformation of financial products into net worth.</a:t>
+              </a:r>
+            </a:p>
+            <a:p>
+              <a:endParaRPr lang="en-US" sz="1600" dirty="0">
                 <a:solidFill>
-                  <a:schemeClr val="accent2"/>
-                </a:solidFill>
-                <a:effectLst/>
-                <a:latin typeface="Times New Roman" panose="02020603050405020304" pitchFamily="18" charset="0"/>
-                <a:ea typeface="KaiTi" panose="02010609060101010101" pitchFamily="49" charset="-122"/>
-              </a:rPr>
-              <a:t>Treasury bonds and central bank bills</a:t>
-            </a:r>
-            <a:r>
-              <a:rPr lang="en-CN" sz="1600" i="1" dirty="0">
-                <a:solidFill>
-                  <a:schemeClr val="accent2"/>
-                </a:solidFill>
-                <a:effectLst/>
-              </a:rPr>
-              <a:t> </a:t>
-            </a:r>
-            <a:endParaRPr lang="en-CN" sz="1600" i="1" dirty="0">
-              <a:solidFill>
-                <a:schemeClr val="accent2"/>
-              </a:solidFill>
-            </a:endParaRPr>
-          </a:p>
-        </p:txBody>
-      </p:sp>
-      <p:sp>
-        <p:nvSpPr>
-          <p:cNvPr id="16" name="TextBox 15">
-            <a:extLst>
-              <a:ext uri="{FF2B5EF4-FFF2-40B4-BE49-F238E27FC236}">
-                <a16:creationId xmlns:a16="http://schemas.microsoft.com/office/drawing/2014/main" id="{2020FC83-2743-FD42-83EE-82A133B1C2BB}"/>
-              </a:ext>
-            </a:extLst>
-          </p:cNvPr>
-          <p:cNvSpPr txBox="1"/>
-          <p:nvPr/>
-        </p:nvSpPr>
-        <p:spPr>
-          <a:xfrm>
-            <a:off x="2815702" y="2844575"/>
-            <a:ext cx="2004347" cy="584775"/>
-          </a:xfrm>
-          <a:prstGeom prst="rect">
-            <a:avLst/>
-          </a:prstGeom>
-          <a:noFill/>
-        </p:spPr>
-        <p:txBody>
-          <a:bodyPr wrap="square">
-            <a:spAutoFit/>
-          </a:bodyPr>
-          <a:lstStyle/>
-          <a:p>
-            <a:pPr algn="ctr"/>
-            <a:r>
-              <a:rPr lang="en-US" sz="1600" i="1" dirty="0">
-                <a:solidFill>
-                  <a:schemeClr val="accent2"/>
+                  <a:schemeClr val="tx1"/>
                 </a:solidFill>
                 <a:latin typeface="Times New Roman" panose="02020603050405020304" pitchFamily="18" charset="0"/>
                 <a:ea typeface="KaiTi" panose="02010609060101010101" pitchFamily="49" charset="-122"/>
-              </a:rPr>
-              <a:t>B</a:t>
-            </a:r>
-            <a:r>
-              <a:rPr lang="en-US" sz="1600" i="1" dirty="0">
+                <a:cs typeface="Times New Roman" panose="02020603050405020304" pitchFamily="18" charset="0"/>
+              </a:endParaRPr>
+            </a:p>
+            <a:p>
+              <a:pPr marL="285750" indent="-285750">
+                <a:buFont typeface="Wingdings" pitchFamily="2" charset="2"/>
+                <a:buChar char="Ø"/>
+              </a:pPr>
+              <a:r>
+                <a:rPr lang="en-US" sz="1600" dirty="0">
+                  <a:solidFill>
+                    <a:schemeClr val="tx1"/>
+                  </a:solidFill>
+                  <a:effectLst/>
+                  <a:latin typeface="Times New Roman" panose="02020603050405020304" pitchFamily="18" charset="0"/>
+                  <a:cs typeface="Times New Roman" panose="02020603050405020304" pitchFamily="18" charset="0"/>
+                </a:rPr>
+                <a:t>table returns</a:t>
+              </a:r>
+            </a:p>
+            <a:p>
+              <a:pPr marL="285750" indent="-285750">
+                <a:buFont typeface="Wingdings" pitchFamily="2" charset="2"/>
+                <a:buChar char="Ø"/>
+              </a:pPr>
+              <a:r>
+                <a:rPr lang="en-US" sz="1600" dirty="0">
+                  <a:solidFill>
+                    <a:schemeClr val="tx1"/>
+                  </a:solidFill>
+                  <a:effectLst/>
+                  <a:latin typeface="Times New Roman" panose="02020603050405020304" pitchFamily="18" charset="0"/>
+                  <a:cs typeface="Times New Roman" panose="02020603050405020304" pitchFamily="18" charset="0"/>
+                </a:rPr>
+                <a:t>marketable disposals </a:t>
+              </a:r>
+            </a:p>
+            <a:p>
+              <a:pPr marL="285750" indent="-285750">
+                <a:buFont typeface="Wingdings" pitchFamily="2" charset="2"/>
+                <a:buChar char="Ø"/>
+              </a:pPr>
+              <a:r>
+                <a:rPr lang="en-US" sz="1600" dirty="0">
+                  <a:solidFill>
+                    <a:schemeClr val="tx1"/>
+                  </a:solidFill>
+                  <a:effectLst/>
+                  <a:latin typeface="Times New Roman" panose="02020603050405020304" pitchFamily="18" charset="0"/>
+                  <a:cs typeface="Times New Roman" panose="02020603050405020304" pitchFamily="18" charset="0"/>
+                </a:rPr>
+                <a:t>new product takeovers</a:t>
+              </a:r>
+              <a:endParaRPr lang="en-US" sz="1600" dirty="0">
                 <a:solidFill>
-                  <a:schemeClr val="accent2"/>
+                  <a:schemeClr val="tx1"/>
                 </a:solidFill>
-                <a:effectLst/>
                 <a:latin typeface="Times New Roman" panose="02020603050405020304" pitchFamily="18" charset="0"/>
-                <a:ea typeface="KaiTi" panose="02010609060101010101" pitchFamily="49" charset="-122"/>
-              </a:rPr>
-              <a:t>onds, Stock ETFs and CSI 300 stocks</a:t>
-            </a:r>
-            <a:r>
-              <a:rPr lang="en-CN" sz="1600" i="1" dirty="0">
-                <a:solidFill>
-                  <a:schemeClr val="accent2"/>
-                </a:solidFill>
-                <a:effectLst/>
-              </a:rPr>
-              <a:t> </a:t>
-            </a:r>
-            <a:endParaRPr lang="en-CN" sz="1600" i="1" dirty="0">
-              <a:solidFill>
-                <a:schemeClr val="accent2"/>
-              </a:solidFill>
-            </a:endParaRPr>
-          </a:p>
-        </p:txBody>
-      </p:sp>
-      <p:grpSp>
-        <p:nvGrpSpPr>
-          <p:cNvPr id="17" name="Group 16">
-            <a:extLst>
-              <a:ext uri="{FF2B5EF4-FFF2-40B4-BE49-F238E27FC236}">
-                <a16:creationId xmlns:a16="http://schemas.microsoft.com/office/drawing/2014/main" id="{8F2DFFBF-98E0-E34F-97BA-C88E4A45095E}"/>
-              </a:ext>
-            </a:extLst>
-          </p:cNvPr>
-          <p:cNvGrpSpPr/>
-          <p:nvPr/>
-        </p:nvGrpSpPr>
-        <p:grpSpPr>
-          <a:xfrm>
-            <a:off x="7371142" y="2550113"/>
-            <a:ext cx="2004348" cy="284748"/>
-            <a:chOff x="2816506" y="3398002"/>
-            <a:chExt cx="2004348" cy="284748"/>
-          </a:xfrm>
-        </p:grpSpPr>
-        <p:cxnSp>
-          <p:nvCxnSpPr>
-            <p:cNvPr id="18" name="Straight Arrow Connector 17">
+                <a:cs typeface="Times New Roman" panose="02020603050405020304" pitchFamily="18" charset="0"/>
+              </a:endParaRPr>
+            </a:p>
+          </p:txBody>
+        </p:sp>
+        <p:sp>
+          <p:nvSpPr>
+            <p:cNvPr id="11" name="Rounded Rectangle 10">
               <a:extLst>
                 <a:ext uri="{FF2B5EF4-FFF2-40B4-BE49-F238E27FC236}">
-                  <a16:creationId xmlns:a16="http://schemas.microsoft.com/office/drawing/2014/main" id="{A5B1195C-C868-0645-BC0A-F76A1F60DB30}"/>
+                  <a16:creationId xmlns:a16="http://schemas.microsoft.com/office/drawing/2014/main" id="{43810543-7417-6E45-9EE9-3D30FFF6D3E7}"/>
                 </a:ext>
               </a:extLst>
             </p:cNvPr>
-            <p:cNvCxnSpPr>
-              <a:cxnSpLocks/>
-            </p:cNvCxnSpPr>
+            <p:cNvSpPr/>
             <p:nvPr/>
-          </p:nvCxnSpPr>
+          </p:nvSpPr>
           <p:spPr>
             <a:xfrm>
-              <a:off x="2816507" y="3398002"/>
-              <a:ext cx="2004347" cy="0"/>
+              <a:off x="4316281" y="1001358"/>
+              <a:ext cx="5139691" cy="1688054"/>
             </a:xfrm>
-            <a:prstGeom prst="straightConnector1">
-              <a:avLst/>
+            <a:prstGeom prst="roundRect">
+              <a:avLst>
+                <a:gd name="adj" fmla="val 4620"/>
+              </a:avLst>
             </a:prstGeom>
-            <a:ln w="15875">
+            <a:solidFill>
+              <a:schemeClr val="tx2">
+                <a:lumMod val="20000"/>
+                <a:lumOff val="80000"/>
+              </a:schemeClr>
+            </a:solidFill>
+            <a:ln w="19050">
               <a:solidFill>
-                <a:schemeClr val="accent5"/>
+                <a:schemeClr val="tx1"/>
               </a:solidFill>
-              <a:tailEnd type="stealth" w="lg" len="lg"/>
             </a:ln>
+            <a:effectLst>
+              <a:outerShdw blurRad="50800" dist="38100" dir="2700000" algn="tl" rotWithShape="0">
+                <a:prstClr val="black">
+                  <a:alpha val="40000"/>
+                </a:prstClr>
+              </a:outerShdw>
+            </a:effectLst>
           </p:spPr>
           <p:style>
-            <a:lnRef idx="1">
-              <a:schemeClr val="accent1"/>
+            <a:lnRef idx="2">
+              <a:schemeClr val="accent1">
+                <a:shade val="50000"/>
+              </a:schemeClr>
             </a:lnRef>
-            <a:fillRef idx="0">
+            <a:fillRef idx="1">
               <a:schemeClr val="accent1"/>
             </a:fillRef>
             <a:effectRef idx="0">
               <a:schemeClr val="accent1"/>
             </a:effectRef>
             <a:fontRef idx="minor">
-              <a:schemeClr val="tx1"/>
+              <a:schemeClr val="lt1"/>
             </a:fontRef>
           </p:style>
-        </p:cxnSp>
-        <p:cxnSp>
-          <p:nvCxnSpPr>
-            <p:cNvPr id="19" name="Straight Arrow Connector 18">
+          <p:txBody>
+            <a:bodyPr rtlCol="0" anchor="ctr"/>
+            <a:lstStyle/>
+            <a:p>
+              <a:r>
+                <a:rPr lang="en-US" sz="1600" b="1" i="1" dirty="0">
+                  <a:solidFill>
+                    <a:schemeClr val="tx1"/>
+                  </a:solidFill>
+                  <a:latin typeface="Times New Roman" panose="02020603050405020304" pitchFamily="18" charset="0"/>
+                  <a:ea typeface="KaiTi" panose="02010609060101010101" pitchFamily="49" charset="-122"/>
+                  <a:cs typeface="Times New Roman" panose="02020603050405020304" pitchFamily="18" charset="0"/>
+                </a:rPr>
+                <a:t>Part 2. </a:t>
+              </a:r>
+              <a:r>
+                <a:rPr lang="en-US" sz="1600" b="1" i="1" dirty="0">
+                  <a:solidFill>
+                    <a:schemeClr val="tx1"/>
+                  </a:solidFill>
+                  <a:effectLst/>
+                  <a:latin typeface="Times New Roman" panose="02020603050405020304" pitchFamily="18" charset="0"/>
+                  <a:ea typeface="KaiTi" panose="02010609060101010101" pitchFamily="49" charset="-122"/>
+                  <a:cs typeface="Times New Roman" panose="02020603050405020304" pitchFamily="18" charset="0"/>
+                </a:rPr>
+                <a:t>Risk control and product system simplification.</a:t>
+              </a:r>
+            </a:p>
+            <a:p>
+              <a:endParaRPr lang="en-US" sz="1600" dirty="0">
+                <a:solidFill>
+                  <a:schemeClr val="tx1"/>
+                </a:solidFill>
+                <a:latin typeface="Times New Roman" panose="02020603050405020304" pitchFamily="18" charset="0"/>
+                <a:ea typeface="KaiTi" panose="02010609060101010101" pitchFamily="49" charset="-122"/>
+                <a:cs typeface="Times New Roman" panose="02020603050405020304" pitchFamily="18" charset="0"/>
+              </a:endParaRPr>
+            </a:p>
+            <a:p>
+              <a:r>
+                <a:rPr lang="en-US" sz="1600" dirty="0">
+                  <a:solidFill>
+                    <a:schemeClr val="tx1"/>
+                  </a:solidFill>
+                  <a:effectLst/>
+                  <a:latin typeface="Times New Roman" panose="02020603050405020304" pitchFamily="18" charset="0"/>
+                  <a:cs typeface="Times New Roman" panose="02020603050405020304" pitchFamily="18" charset="0"/>
+                </a:rPr>
+                <a:t>Simplify the product system, reduce nesting, and enhance product penetration by the requirements of the new asset management regulations.</a:t>
+              </a:r>
+              <a:endParaRPr lang="en-US" sz="1600" dirty="0">
+                <a:solidFill>
+                  <a:schemeClr val="tx1"/>
+                </a:solidFill>
+                <a:latin typeface="Times New Roman" panose="02020603050405020304" pitchFamily="18" charset="0"/>
+                <a:cs typeface="Times New Roman" panose="02020603050405020304" pitchFamily="18" charset="0"/>
+              </a:endParaRPr>
+            </a:p>
+          </p:txBody>
+        </p:sp>
+        <p:sp>
+          <p:nvSpPr>
+            <p:cNvPr id="12" name="Rounded Rectangle 11">
               <a:extLst>
                 <a:ext uri="{FF2B5EF4-FFF2-40B4-BE49-F238E27FC236}">
-                  <a16:creationId xmlns:a16="http://schemas.microsoft.com/office/drawing/2014/main" id="{F167FCED-13BB-324E-AFA2-759B4E3EE4A9}"/>
+                  <a16:creationId xmlns:a16="http://schemas.microsoft.com/office/drawing/2014/main" id="{92CCC14D-5F06-5D47-8837-11D3EA08DBF9}"/>
                 </a:ext>
               </a:extLst>
             </p:cNvPr>
-            <p:cNvCxnSpPr>
-              <a:cxnSpLocks/>
-            </p:cNvCxnSpPr>
+            <p:cNvSpPr/>
             <p:nvPr/>
-          </p:nvCxnSpPr>
+          </p:nvSpPr>
           <p:spPr>
             <a:xfrm>
-              <a:off x="2816506" y="3682750"/>
-              <a:ext cx="2004347" cy="0"/>
+              <a:off x="612290" y="2842935"/>
+              <a:ext cx="8843682" cy="1688054"/>
             </a:xfrm>
-            <a:prstGeom prst="straightConnector1">
-              <a:avLst/>
+            <a:prstGeom prst="roundRect">
+              <a:avLst>
+                <a:gd name="adj" fmla="val 4620"/>
+              </a:avLst>
             </a:prstGeom>
-            <a:ln w="15875">
+            <a:solidFill>
+              <a:schemeClr val="accent1">
+                <a:lumMod val="20000"/>
+                <a:lumOff val="80000"/>
+              </a:schemeClr>
+            </a:solidFill>
+            <a:ln w="19050">
               <a:solidFill>
-                <a:schemeClr val="accent5"/>
+                <a:schemeClr val="tx1"/>
               </a:solidFill>
-              <a:headEnd type="stealth" w="lg" len="lg"/>
-              <a:tailEnd type="none" w="lg" len="lg"/>
             </a:ln>
+            <a:effectLst>
+              <a:outerShdw blurRad="50800" dist="38100" dir="2700000" algn="tl" rotWithShape="0">
+                <a:prstClr val="black">
+                  <a:alpha val="40000"/>
+                </a:prstClr>
+              </a:outerShdw>
+            </a:effectLst>
           </p:spPr>
           <p:style>
-            <a:lnRef idx="1">
-              <a:schemeClr val="accent1"/>
+            <a:lnRef idx="2">
+              <a:schemeClr val="accent1">
+                <a:shade val="50000"/>
+              </a:schemeClr>
             </a:lnRef>
-            <a:fillRef idx="0">
+            <a:fillRef idx="1">
               <a:schemeClr val="accent1"/>
             </a:fillRef>
             <a:effectRef idx="0">
               <a:schemeClr val="accent1"/>
             </a:effectRef>
             <a:fontRef idx="minor">
-              <a:schemeClr val="tx1"/>
+              <a:schemeClr val="lt1"/>
             </a:fontRef>
           </p:style>
-        </p:cxnSp>
-      </p:grpSp>
-      <p:sp>
-        <p:nvSpPr>
-          <p:cNvPr id="20" name="TextBox 19">
-            <a:extLst>
-              <a:ext uri="{FF2B5EF4-FFF2-40B4-BE49-F238E27FC236}">
-                <a16:creationId xmlns:a16="http://schemas.microsoft.com/office/drawing/2014/main" id="{3A074757-8146-2B41-8844-5F423D409105}"/>
-              </a:ext>
-            </a:extLst>
-          </p:cNvPr>
-          <p:cNvSpPr txBox="1"/>
-          <p:nvPr/>
-        </p:nvSpPr>
-        <p:spPr>
-          <a:xfrm>
-            <a:off x="7371137" y="1959626"/>
-            <a:ext cx="2004347" cy="584775"/>
-          </a:xfrm>
-          <a:prstGeom prst="rect">
-            <a:avLst/>
-          </a:prstGeom>
-          <a:noFill/>
-        </p:spPr>
-        <p:txBody>
-          <a:bodyPr wrap="square">
-            <a:spAutoFit/>
-          </a:bodyPr>
-          <a:lstStyle/>
-          <a:p>
-            <a:pPr algn="ctr"/>
-            <a:r>
-              <a:rPr lang="en-US" sz="1600" i="1" dirty="0">
-                <a:solidFill>
-                  <a:schemeClr val="accent5"/>
-                </a:solidFill>
-                <a:effectLst/>
-                <a:latin typeface="Times New Roman" panose="02020603050405020304" pitchFamily="18" charset="0"/>
-                <a:ea typeface="KaiTi" panose="02010609060101010101" pitchFamily="49" charset="-122"/>
-              </a:rPr>
-              <a:t>Treasury bonds and central bank bills</a:t>
-            </a:r>
-            <a:r>
-              <a:rPr lang="en-CN" sz="1600" i="1" dirty="0">
-                <a:solidFill>
-                  <a:schemeClr val="accent5"/>
-                </a:solidFill>
-                <a:effectLst/>
-              </a:rPr>
-              <a:t> </a:t>
-            </a:r>
-            <a:endParaRPr lang="en-CN" sz="1600" i="1" dirty="0">
-              <a:solidFill>
-                <a:schemeClr val="accent5"/>
-              </a:solidFill>
-            </a:endParaRPr>
-          </a:p>
-        </p:txBody>
-      </p:sp>
-      <p:sp>
-        <p:nvSpPr>
-          <p:cNvPr id="21" name="TextBox 20">
-            <a:extLst>
-              <a:ext uri="{FF2B5EF4-FFF2-40B4-BE49-F238E27FC236}">
-                <a16:creationId xmlns:a16="http://schemas.microsoft.com/office/drawing/2014/main" id="{662CC380-DC31-CA4D-BD40-C5B155503B3F}"/>
-              </a:ext>
-            </a:extLst>
-          </p:cNvPr>
-          <p:cNvSpPr txBox="1"/>
-          <p:nvPr/>
-        </p:nvSpPr>
-        <p:spPr>
-          <a:xfrm>
-            <a:off x="7371137" y="2842763"/>
-            <a:ext cx="2004347" cy="338554"/>
-          </a:xfrm>
-          <a:prstGeom prst="rect">
-            <a:avLst/>
-          </a:prstGeom>
-          <a:noFill/>
-        </p:spPr>
-        <p:txBody>
-          <a:bodyPr wrap="square">
-            <a:spAutoFit/>
-          </a:bodyPr>
-          <a:lstStyle/>
-          <a:p>
-            <a:pPr algn="ctr"/>
-            <a:r>
-              <a:rPr lang="en-US" sz="1600" i="1" dirty="0">
-                <a:solidFill>
-                  <a:schemeClr val="accent5"/>
-                </a:solidFill>
-                <a:latin typeface="Times New Roman" panose="02020603050405020304" pitchFamily="18" charset="0"/>
-                <a:ea typeface="KaiTi" panose="02010609060101010101" pitchFamily="49" charset="-122"/>
-              </a:rPr>
-              <a:t>Special Funding</a:t>
-            </a:r>
-            <a:r>
-              <a:rPr lang="zh-CN" altLang="en-US" sz="1600" i="1" dirty="0">
-                <a:solidFill>
-                  <a:schemeClr val="accent5"/>
-                </a:solidFill>
-                <a:latin typeface="Times New Roman" panose="02020603050405020304" pitchFamily="18" charset="0"/>
-                <a:ea typeface="KaiTi" panose="02010609060101010101" pitchFamily="49" charset="-122"/>
-              </a:rPr>
-              <a:t> </a:t>
-            </a:r>
-            <a:r>
-              <a:rPr lang="en-US" altLang="zh-CN" sz="1600" b="1" dirty="0">
+          <p:txBody>
+            <a:bodyPr rtlCol="0" anchor="ctr"/>
+            <a:lstStyle/>
+            <a:p>
+              <a:r>
+                <a:rPr lang="en-US" sz="1600" b="1" i="1" dirty="0">
+                  <a:solidFill>
+                    <a:schemeClr val="tx1"/>
+                  </a:solidFill>
+                  <a:latin typeface="Times New Roman" panose="02020603050405020304" pitchFamily="18" charset="0"/>
+                  <a:ea typeface="KaiTi" panose="02010609060101010101" pitchFamily="49" charset="-122"/>
+                  <a:cs typeface="Times New Roman" panose="02020603050405020304" pitchFamily="18" charset="0"/>
+                </a:rPr>
+                <a:t>Part 3. </a:t>
+              </a:r>
+              <a:r>
+                <a:rPr lang="en-US" sz="1600" b="1" i="1" dirty="0">
+                  <a:solidFill>
+                    <a:schemeClr val="tx1"/>
+                  </a:solidFill>
+                  <a:effectLst/>
+                  <a:latin typeface="Times New Roman" panose="02020603050405020304" pitchFamily="18" charset="0"/>
+                  <a:ea typeface="KaiTi" panose="02010609060101010101" pitchFamily="49" charset="-122"/>
+                  <a:cs typeface="Times New Roman" panose="02020603050405020304" pitchFamily="18" charset="0"/>
+                </a:rPr>
+                <a:t>Establishment of asset management subsidiary</a:t>
+              </a:r>
+              <a:r>
+                <a:rPr lang="en-US" sz="1600" b="1" i="1" dirty="0">
+                  <a:solidFill>
+                    <a:schemeClr val="tx1"/>
+                  </a:solidFill>
+                  <a:latin typeface="Times New Roman" panose="02020603050405020304" pitchFamily="18" charset="0"/>
+                  <a:ea typeface="KaiTi" panose="02010609060101010101" pitchFamily="49" charset="-122"/>
+                  <a:cs typeface="Times New Roman" panose="02020603050405020304" pitchFamily="18" charset="0"/>
+                </a:rPr>
+                <a:t>.</a:t>
+              </a:r>
+            </a:p>
+            <a:p>
+              <a:endParaRPr lang="en-US" sz="1600" dirty="0">
                 <a:solidFill>
                   <a:schemeClr val="tx1"/>
                 </a:solidFill>
                 <a:latin typeface="Times New Roman" panose="02020603050405020304" pitchFamily="18" charset="0"/>
                 <a:ea typeface="KaiTi" panose="02010609060101010101" pitchFamily="49" charset="-122"/>
                 <a:cs typeface="Times New Roman" panose="02020603050405020304" pitchFamily="18" charset="0"/>
-              </a:rPr>
-              <a:t>💰</a:t>
-            </a:r>
-            <a:endParaRPr lang="en-CN" sz="1600" i="1" dirty="0">
-              <a:solidFill>
-                <a:schemeClr val="accent5"/>
-              </a:solidFill>
-            </a:endParaRPr>
-          </a:p>
-        </p:txBody>
-      </p:sp>
-      <p:grpSp>
-        <p:nvGrpSpPr>
-          <p:cNvPr id="50" name="Group 49">
-            <a:extLst>
-              <a:ext uri="{FF2B5EF4-FFF2-40B4-BE49-F238E27FC236}">
-                <a16:creationId xmlns:a16="http://schemas.microsoft.com/office/drawing/2014/main" id="{65E970A6-F12E-B642-B892-41D40B8CF863}"/>
-              </a:ext>
-            </a:extLst>
-          </p:cNvPr>
-          <p:cNvGrpSpPr/>
-          <p:nvPr/>
-        </p:nvGrpSpPr>
-        <p:grpSpPr>
-          <a:xfrm>
-            <a:off x="5853234" y="3015735"/>
-            <a:ext cx="485527" cy="1253115"/>
-            <a:chOff x="5913392" y="3097931"/>
-            <a:chExt cx="485527" cy="1253115"/>
-          </a:xfrm>
-        </p:grpSpPr>
-        <p:cxnSp>
-          <p:nvCxnSpPr>
-            <p:cNvPr id="23" name="Straight Arrow Connector 22">
-              <a:extLst>
-                <a:ext uri="{FF2B5EF4-FFF2-40B4-BE49-F238E27FC236}">
-                  <a16:creationId xmlns:a16="http://schemas.microsoft.com/office/drawing/2014/main" id="{A2FDAF3B-76F2-A641-9E8C-04DB873C34F1}"/>
-                </a:ext>
-              </a:extLst>
-            </p:cNvPr>
-            <p:cNvCxnSpPr>
-              <a:cxnSpLocks/>
-            </p:cNvCxnSpPr>
-            <p:nvPr/>
-          </p:nvCxnSpPr>
-          <p:spPr>
-            <a:xfrm rot="16200000">
-              <a:off x="5306294" y="3705029"/>
-              <a:ext cx="1214196" cy="0"/>
-            </a:xfrm>
-            <a:prstGeom prst="straightConnector1">
-              <a:avLst/>
-            </a:prstGeom>
-            <a:ln w="15875">
-              <a:solidFill>
-                <a:srgbClr val="C00000"/>
-              </a:solidFill>
-              <a:tailEnd type="stealth" w="lg" len="lg"/>
-            </a:ln>
-          </p:spPr>
-          <p:style>
-            <a:lnRef idx="1">
-              <a:schemeClr val="accent1"/>
-            </a:lnRef>
-            <a:fillRef idx="0">
-              <a:schemeClr val="accent1"/>
-            </a:fillRef>
-            <a:effectRef idx="0">
-              <a:schemeClr val="accent1"/>
-            </a:effectRef>
-            <a:fontRef idx="minor">
-              <a:schemeClr val="tx1"/>
-            </a:fontRef>
-          </p:style>
-        </p:cxnSp>
-        <p:cxnSp>
-          <p:nvCxnSpPr>
-            <p:cNvPr id="24" name="Straight Arrow Connector 23">
-              <a:extLst>
-                <a:ext uri="{FF2B5EF4-FFF2-40B4-BE49-F238E27FC236}">
-                  <a16:creationId xmlns:a16="http://schemas.microsoft.com/office/drawing/2014/main" id="{204F5A91-EFFE-7D4D-AB42-807A21ED18A0}"/>
-                </a:ext>
-              </a:extLst>
-            </p:cNvPr>
-            <p:cNvCxnSpPr>
-              <a:cxnSpLocks/>
-            </p:cNvCxnSpPr>
-            <p:nvPr/>
-          </p:nvCxnSpPr>
-          <p:spPr>
-            <a:xfrm rot="16200000">
-              <a:off x="5791821" y="3743948"/>
-              <a:ext cx="1214196" cy="0"/>
-            </a:xfrm>
-            <a:prstGeom prst="straightConnector1">
-              <a:avLst/>
-            </a:prstGeom>
-            <a:ln w="15875">
-              <a:solidFill>
-                <a:srgbClr val="C00000"/>
-              </a:solidFill>
-              <a:headEnd type="stealth" w="lg" len="lg"/>
-              <a:tailEnd type="none" w="lg" len="lg"/>
-            </a:ln>
-          </p:spPr>
-          <p:style>
-            <a:lnRef idx="1">
-              <a:schemeClr val="accent1"/>
-            </a:lnRef>
-            <a:fillRef idx="0">
-              <a:schemeClr val="accent1"/>
-            </a:fillRef>
-            <a:effectRef idx="0">
-              <a:schemeClr val="accent1"/>
-            </a:effectRef>
-            <a:fontRef idx="minor">
-              <a:schemeClr val="tx1"/>
-            </a:fontRef>
-          </p:style>
-        </p:cxnSp>
+              </a:endParaRPr>
+            </a:p>
+            <a:p>
+              <a:pPr marL="285750" indent="-285750">
+                <a:buFont typeface="Wingdings" pitchFamily="2" charset="2"/>
+                <a:buChar char="Ø"/>
+              </a:pPr>
+              <a:r>
+                <a:rPr lang="en-US" sz="1600" dirty="0">
+                  <a:solidFill>
+                    <a:schemeClr val="tx1"/>
+                  </a:solidFill>
+                  <a:latin typeface="Times New Roman" panose="02020603050405020304" pitchFamily="18" charset="0"/>
+                  <a:ea typeface="KaiTi" panose="02010609060101010101" pitchFamily="49" charset="-122"/>
+                  <a:cs typeface="Times New Roman" panose="02020603050405020304" pitchFamily="18" charset="0"/>
+                </a:rPr>
+                <a:t>Transferring its stock of asset management business to asset management subsidiaries.</a:t>
+              </a:r>
+            </a:p>
+            <a:p>
+              <a:pPr marL="285750" indent="-285750">
+                <a:buFont typeface="Wingdings" pitchFamily="2" charset="2"/>
+                <a:buChar char="Ø"/>
+              </a:pPr>
+              <a:r>
+                <a:rPr lang="en-US" sz="1600" dirty="0">
+                  <a:solidFill>
+                    <a:schemeClr val="tx1"/>
+                  </a:solidFill>
+                  <a:latin typeface="Times New Roman" panose="02020603050405020304" pitchFamily="18" charset="0"/>
+                  <a:ea typeface="KaiTi" panose="02010609060101010101" pitchFamily="49" charset="-122"/>
+                  <a:cs typeface="Times New Roman" panose="02020603050405020304" pitchFamily="18" charset="0"/>
+                </a:rPr>
+                <a:t>Bank wealth management subsidiaries also issued some new products, with stock transformation and new issuance going in parallel.</a:t>
+              </a:r>
+            </a:p>
+          </p:txBody>
+        </p:sp>
       </p:grpSp>
-      <p:sp>
-        <p:nvSpPr>
-          <p:cNvPr id="25" name="TextBox 24">
-            <a:extLst>
-              <a:ext uri="{FF2B5EF4-FFF2-40B4-BE49-F238E27FC236}">
-                <a16:creationId xmlns:a16="http://schemas.microsoft.com/office/drawing/2014/main" id="{7CC35E44-C486-CC4E-98D4-562F61EC7F83}"/>
-              </a:ext>
-            </a:extLst>
-          </p:cNvPr>
-          <p:cNvSpPr txBox="1"/>
-          <p:nvPr/>
-        </p:nvSpPr>
-        <p:spPr>
-          <a:xfrm>
-            <a:off x="6337962" y="3361359"/>
-            <a:ext cx="1207929" cy="584775"/>
-          </a:xfrm>
-          <a:prstGeom prst="rect">
-            <a:avLst/>
-          </a:prstGeom>
-          <a:noFill/>
-        </p:spPr>
-        <p:txBody>
-          <a:bodyPr wrap="square">
-            <a:spAutoFit/>
-          </a:bodyPr>
-          <a:lstStyle/>
-          <a:p>
-            <a:pPr algn="ctr"/>
-            <a:r>
-              <a:rPr lang="en-US" sz="1600" i="1" dirty="0">
-                <a:solidFill>
-                  <a:srgbClr val="C00000"/>
-                </a:solidFill>
-                <a:effectLst/>
-                <a:latin typeface="Times New Roman" panose="02020603050405020304" pitchFamily="18" charset="0"/>
-                <a:ea typeface="KaiTi" panose="02010609060101010101" pitchFamily="49" charset="-122"/>
-              </a:rPr>
-              <a:t>Special Funding </a:t>
-            </a:r>
-            <a:r>
-              <a:rPr lang="en-US" altLang="zh-CN" sz="1600" b="1" dirty="0">
-                <a:solidFill>
-                  <a:schemeClr val="tx1"/>
-                </a:solidFill>
-                <a:latin typeface="Times New Roman" panose="02020603050405020304" pitchFamily="18" charset="0"/>
-                <a:ea typeface="KaiTi" panose="02010609060101010101" pitchFamily="49" charset="-122"/>
-                <a:cs typeface="Times New Roman" panose="02020603050405020304" pitchFamily="18" charset="0"/>
-              </a:rPr>
-              <a:t>💰</a:t>
-            </a:r>
-            <a:endParaRPr lang="en-US" sz="1600" i="1" dirty="0">
-              <a:solidFill>
-                <a:srgbClr val="C00000"/>
-              </a:solidFill>
-              <a:effectLst/>
-              <a:latin typeface="Times New Roman" panose="02020603050405020304" pitchFamily="18" charset="0"/>
-              <a:ea typeface="KaiTi" panose="02010609060101010101" pitchFamily="49" charset="-122"/>
-            </a:endParaRPr>
-          </a:p>
-        </p:txBody>
-      </p:sp>
-      <p:sp>
-        <p:nvSpPr>
-          <p:cNvPr id="26" name="TextBox 25">
-            <a:extLst>
-              <a:ext uri="{FF2B5EF4-FFF2-40B4-BE49-F238E27FC236}">
-                <a16:creationId xmlns:a16="http://schemas.microsoft.com/office/drawing/2014/main" id="{35838F08-94A2-9543-AAE0-9DFE496251F0}"/>
-              </a:ext>
-            </a:extLst>
-          </p:cNvPr>
-          <p:cNvSpPr txBox="1"/>
-          <p:nvPr/>
-        </p:nvSpPr>
-        <p:spPr>
-          <a:xfrm>
-            <a:off x="4879230" y="3484943"/>
-            <a:ext cx="972222" cy="338554"/>
-          </a:xfrm>
-          <a:prstGeom prst="rect">
-            <a:avLst/>
-          </a:prstGeom>
-          <a:noFill/>
-        </p:spPr>
-        <p:txBody>
-          <a:bodyPr wrap="square">
-            <a:spAutoFit/>
-          </a:bodyPr>
-          <a:lstStyle/>
-          <a:p>
-            <a:pPr algn="ctr"/>
-            <a:r>
-              <a:rPr lang="en-US" sz="1600" i="1" dirty="0">
-                <a:solidFill>
-                  <a:srgbClr val="C00000"/>
-                </a:solidFill>
-                <a:latin typeface="Times New Roman" panose="02020603050405020304" pitchFamily="18" charset="0"/>
-                <a:ea typeface="KaiTi" panose="02010609060101010101" pitchFamily="49" charset="-122"/>
-              </a:rPr>
-              <a:t>Stock</a:t>
-            </a:r>
-            <a:r>
-              <a:rPr lang="zh-CN" altLang="en-US" sz="1600" i="1" dirty="0">
-                <a:solidFill>
-                  <a:srgbClr val="C00000"/>
-                </a:solidFill>
-                <a:latin typeface="Times New Roman" panose="02020603050405020304" pitchFamily="18" charset="0"/>
-                <a:ea typeface="KaiTi" panose="02010609060101010101" pitchFamily="49" charset="-122"/>
-              </a:rPr>
-              <a:t> </a:t>
-            </a:r>
-            <a:r>
-              <a:rPr lang="en-US" altLang="zh-CN" sz="1600" b="1" dirty="0">
-                <a:solidFill>
-                  <a:schemeClr val="tx1"/>
-                </a:solidFill>
-                <a:latin typeface="Times New Roman" panose="02020603050405020304" pitchFamily="18" charset="0"/>
-                <a:ea typeface="KaiTi" panose="02010609060101010101" pitchFamily="49" charset="-122"/>
-                <a:cs typeface="Times New Roman" panose="02020603050405020304" pitchFamily="18" charset="0"/>
-              </a:rPr>
-              <a:t>💵</a:t>
-            </a:r>
-            <a:endParaRPr lang="en-CN" sz="1600" i="1" dirty="0">
-              <a:solidFill>
-                <a:srgbClr val="C00000"/>
-              </a:solidFill>
-            </a:endParaRPr>
-          </a:p>
-        </p:txBody>
-      </p:sp>
-      <p:sp>
-        <p:nvSpPr>
-          <p:cNvPr id="49" name="Rounded Rectangle 48">
-            <a:extLst>
-              <a:ext uri="{FF2B5EF4-FFF2-40B4-BE49-F238E27FC236}">
-                <a16:creationId xmlns:a16="http://schemas.microsoft.com/office/drawing/2014/main" id="{06043D37-2C65-7A48-AB42-F2DAD582BB2E}"/>
-              </a:ext>
-            </a:extLst>
-          </p:cNvPr>
-          <p:cNvSpPr/>
-          <p:nvPr/>
-        </p:nvSpPr>
-        <p:spPr>
-          <a:xfrm>
-            <a:off x="166632" y="1777666"/>
-            <a:ext cx="11858735" cy="3302668"/>
-          </a:xfrm>
-          <a:prstGeom prst="roundRect">
-            <a:avLst>
-              <a:gd name="adj" fmla="val 2453"/>
-            </a:avLst>
-          </a:prstGeom>
-          <a:noFill/>
-          <a:ln w="19050">
-            <a:solidFill>
-              <a:schemeClr val="accent6">
-                <a:lumMod val="50000"/>
-              </a:schemeClr>
-            </a:solidFill>
-            <a:prstDash val="solid"/>
-          </a:ln>
-          <a:effectLst>
-            <a:outerShdw blurRad="50800" dist="38100" dir="2700000" algn="tl" rotWithShape="0">
-              <a:prstClr val="black">
-                <a:alpha val="40000"/>
-              </a:prstClr>
-            </a:outerShdw>
-          </a:effectLst>
-        </p:spPr>
-        <p:style>
-          <a:lnRef idx="2">
-            <a:schemeClr val="accent1">
-              <a:shade val="50000"/>
-            </a:schemeClr>
-          </a:lnRef>
-          <a:fillRef idx="1">
-            <a:schemeClr val="accent1"/>
-          </a:fillRef>
-          <a:effectRef idx="0">
-            <a:schemeClr val="accent1"/>
-          </a:effectRef>
-          <a:fontRef idx="minor">
-            <a:schemeClr val="lt1"/>
-          </a:fontRef>
-        </p:style>
-        <p:txBody>
-          <a:bodyPr rtlCol="0" anchor="t"/>
-          <a:lstStyle/>
-          <a:p>
-            <a:endParaRPr lang="en-CN" b="1" i="1" dirty="0">
-              <a:solidFill>
-                <a:srgbClr val="C00000"/>
-              </a:solidFill>
-              <a:latin typeface="Times New Roman" panose="02020603050405020304" pitchFamily="18" charset="0"/>
-              <a:ea typeface="KaiTi" panose="02010609060101010101" pitchFamily="49" charset="-122"/>
-              <a:cs typeface="Times New Roman" panose="02020603050405020304" pitchFamily="18" charset="0"/>
-            </a:endParaRPr>
-          </a:p>
-        </p:txBody>
-      </p:sp>
-      <p:sp>
-        <p:nvSpPr>
-          <p:cNvPr id="186" name="TextBox 185">
-            <a:extLst>
-              <a:ext uri="{FF2B5EF4-FFF2-40B4-BE49-F238E27FC236}">
-                <a16:creationId xmlns:a16="http://schemas.microsoft.com/office/drawing/2014/main" id="{93EDFCC8-D56B-3246-86F7-1E304047DA07}"/>
-              </a:ext>
-            </a:extLst>
-          </p:cNvPr>
-          <p:cNvSpPr txBox="1"/>
-          <p:nvPr/>
-        </p:nvSpPr>
-        <p:spPr>
-          <a:xfrm>
-            <a:off x="8600398" y="4014428"/>
-            <a:ext cx="3425371" cy="1065869"/>
-          </a:xfrm>
-          <a:prstGeom prst="rect">
-            <a:avLst/>
-          </a:prstGeom>
-          <a:noFill/>
-        </p:spPr>
-        <p:txBody>
-          <a:bodyPr wrap="square">
-            <a:spAutoFit/>
-          </a:bodyPr>
-          <a:lstStyle/>
-          <a:p>
-            <a:pPr>
-              <a:lnSpc>
-                <a:spcPct val="120000"/>
-              </a:lnSpc>
-            </a:pPr>
-            <a:r>
-              <a:rPr lang="en-CN" sz="1800" b="1" i="1" dirty="0">
-                <a:solidFill>
-                  <a:schemeClr val="accent2"/>
-                </a:solidFill>
-                <a:effectLst/>
-                <a:latin typeface="Times New Roman" panose="02020603050405020304" pitchFamily="18" charset="0"/>
-                <a:ea typeface="KaiTi" panose="02010609060101010101" pitchFamily="49" charset="-122"/>
-              </a:rPr>
-              <a:t>Part 1. </a:t>
-            </a:r>
-            <a:r>
-              <a:rPr lang="en-CN" b="1" i="1" dirty="0">
-                <a:solidFill>
-                  <a:schemeClr val="accent2"/>
-                </a:solidFill>
-                <a:latin typeface="Times New Roman" panose="02020603050405020304" pitchFamily="18" charset="0"/>
-                <a:ea typeface="KaiTi" panose="02010609060101010101" pitchFamily="49" charset="-122"/>
-              </a:rPr>
-              <a:t>S</a:t>
-            </a:r>
-            <a:r>
-              <a:rPr lang="en-CN" sz="1800" b="1" i="1" dirty="0">
-                <a:solidFill>
-                  <a:schemeClr val="accent2"/>
-                </a:solidFill>
-                <a:effectLst/>
-                <a:latin typeface="Times New Roman" panose="02020603050405020304" pitchFamily="18" charset="0"/>
-                <a:ea typeface="KaiTi" panose="02010609060101010101" pitchFamily="49" charset="-122"/>
-              </a:rPr>
-              <a:t>wap </a:t>
-            </a:r>
-            <a:r>
-              <a:rPr lang="en-CN" b="1" i="1" dirty="0">
-                <a:solidFill>
-                  <a:schemeClr val="accent2"/>
-                </a:solidFill>
-                <a:latin typeface="Times New Roman" panose="02020603050405020304" pitchFamily="18" charset="0"/>
-                <a:ea typeface="KaiTi" panose="02010609060101010101" pitchFamily="49" charset="-122"/>
-              </a:rPr>
-              <a:t>O</a:t>
-            </a:r>
-            <a:r>
-              <a:rPr lang="en-CN" sz="1800" b="1" i="1" dirty="0">
-                <a:solidFill>
-                  <a:schemeClr val="accent2"/>
-                </a:solidFill>
-                <a:effectLst/>
-                <a:latin typeface="Times New Roman" panose="02020603050405020304" pitchFamily="18" charset="0"/>
-                <a:ea typeface="KaiTi" panose="02010609060101010101" pitchFamily="49" charset="-122"/>
-              </a:rPr>
-              <a:t>peration</a:t>
-            </a:r>
-          </a:p>
-          <a:p>
-            <a:pPr>
-              <a:lnSpc>
-                <a:spcPct val="120000"/>
-              </a:lnSpc>
-            </a:pPr>
-            <a:r>
-              <a:rPr lang="en-CN" b="1" i="1" dirty="0">
-                <a:solidFill>
-                  <a:schemeClr val="accent5"/>
-                </a:solidFill>
-                <a:latin typeface="Times New Roman" panose="02020603050405020304" pitchFamily="18" charset="0"/>
-                <a:ea typeface="KaiTi" panose="02010609060101010101" pitchFamily="49" charset="-122"/>
-              </a:rPr>
-              <a:t>Part 2. I</a:t>
-            </a:r>
-            <a:r>
-              <a:rPr lang="en-CN" sz="1800" b="1" i="1" dirty="0">
-                <a:solidFill>
-                  <a:schemeClr val="accent5"/>
-                </a:solidFill>
-                <a:effectLst/>
-                <a:latin typeface="Times New Roman" panose="02020603050405020304" pitchFamily="18" charset="0"/>
-                <a:ea typeface="KaiTi" panose="02010609060101010101" pitchFamily="49" charset="-122"/>
-              </a:rPr>
-              <a:t>nstitutional </a:t>
-            </a:r>
-            <a:r>
-              <a:rPr lang="en-CN" b="1" i="1" dirty="0">
-                <a:solidFill>
-                  <a:schemeClr val="accent5"/>
-                </a:solidFill>
-                <a:latin typeface="Times New Roman" panose="02020603050405020304" pitchFamily="18" charset="0"/>
-                <a:ea typeface="KaiTi" panose="02010609060101010101" pitchFamily="49" charset="-122"/>
-              </a:rPr>
-              <a:t>F</a:t>
-            </a:r>
-            <a:r>
-              <a:rPr lang="en-CN" sz="1800" b="1" i="1" dirty="0">
-                <a:solidFill>
-                  <a:schemeClr val="accent5"/>
-                </a:solidFill>
-                <a:effectLst/>
-                <a:latin typeface="Times New Roman" panose="02020603050405020304" pitchFamily="18" charset="0"/>
-                <a:ea typeface="KaiTi" panose="02010609060101010101" pitchFamily="49" charset="-122"/>
-              </a:rPr>
-              <a:t>inancing</a:t>
-            </a:r>
-            <a:endParaRPr lang="en-CN" b="1" i="1" dirty="0">
-              <a:solidFill>
-                <a:schemeClr val="accent5"/>
-              </a:solidFill>
-              <a:latin typeface="Times New Roman" panose="02020603050405020304" pitchFamily="18" charset="0"/>
-              <a:ea typeface="KaiTi" panose="02010609060101010101" pitchFamily="49" charset="-122"/>
-            </a:endParaRPr>
-          </a:p>
-          <a:p>
-            <a:pPr>
-              <a:lnSpc>
-                <a:spcPct val="120000"/>
-              </a:lnSpc>
-            </a:pPr>
-            <a:r>
-              <a:rPr lang="en-CN" sz="1800" b="1" i="1" dirty="0">
-                <a:solidFill>
-                  <a:srgbClr val="C00000"/>
-                </a:solidFill>
-                <a:effectLst/>
-                <a:latin typeface="Times New Roman" panose="02020603050405020304" pitchFamily="18" charset="0"/>
-                <a:ea typeface="KaiTi" panose="02010609060101010101" pitchFamily="49" charset="-122"/>
-              </a:rPr>
-              <a:t>Part 3. </a:t>
-            </a:r>
-            <a:r>
-              <a:rPr lang="en-CN" b="1" i="1" dirty="0">
-                <a:solidFill>
-                  <a:srgbClr val="C00000"/>
-                </a:solidFill>
-                <a:latin typeface="Times New Roman" panose="02020603050405020304" pitchFamily="18" charset="0"/>
-                <a:ea typeface="KaiTi" panose="02010609060101010101" pitchFamily="49" charset="-122"/>
-              </a:rPr>
-              <a:t>I</a:t>
-            </a:r>
-            <a:r>
-              <a:rPr lang="en-CN" sz="1800" b="1" i="1" dirty="0">
-                <a:solidFill>
-                  <a:srgbClr val="C00000"/>
-                </a:solidFill>
-                <a:effectLst/>
-                <a:latin typeface="Times New Roman" panose="02020603050405020304" pitchFamily="18" charset="0"/>
-                <a:ea typeface="KaiTi" panose="02010609060101010101" pitchFamily="49" charset="-122"/>
-              </a:rPr>
-              <a:t>nstitutional </a:t>
-            </a:r>
-            <a:r>
-              <a:rPr lang="en-CN" b="1" i="1" dirty="0">
-                <a:solidFill>
-                  <a:srgbClr val="C00000"/>
-                </a:solidFill>
-                <a:latin typeface="Times New Roman" panose="02020603050405020304" pitchFamily="18" charset="0"/>
-                <a:ea typeface="KaiTi" panose="02010609060101010101" pitchFamily="49" charset="-122"/>
-              </a:rPr>
-              <a:t>I</a:t>
-            </a:r>
-            <a:r>
-              <a:rPr lang="en-CN" sz="1800" b="1" i="1" dirty="0">
-                <a:solidFill>
-                  <a:srgbClr val="C00000"/>
-                </a:solidFill>
-                <a:effectLst/>
-                <a:latin typeface="Times New Roman" panose="02020603050405020304" pitchFamily="18" charset="0"/>
-                <a:ea typeface="KaiTi" panose="02010609060101010101" pitchFamily="49" charset="-122"/>
-              </a:rPr>
-              <a:t>nvestment</a:t>
-            </a:r>
-            <a:r>
-              <a:rPr lang="en-CN" b="1" i="1" dirty="0">
-                <a:solidFill>
-                  <a:srgbClr val="C00000"/>
-                </a:solidFill>
-                <a:effectLst/>
-              </a:rPr>
-              <a:t> </a:t>
-            </a:r>
-            <a:endParaRPr lang="en-CN" b="1" i="1" dirty="0">
-              <a:solidFill>
-                <a:srgbClr val="C00000"/>
-              </a:solidFill>
-            </a:endParaRPr>
-          </a:p>
-        </p:txBody>
-      </p:sp>
     </p:spTree>
     <p:extLst>
       <p:ext uri="{BB962C8B-B14F-4D97-AF65-F5344CB8AC3E}">
-        <p14:creationId xmlns:p14="http://schemas.microsoft.com/office/powerpoint/2010/main" val="2896180752"/>
+        <p14:creationId xmlns:p14="http://schemas.microsoft.com/office/powerpoint/2010/main" val="3484738616"/>
       </p:ext>
     </p:extLst>
   </p:cSld>
